--- a/deliverables/smb_bundles/smb_bundles_1_identify.pptx
+++ b/deliverables/smb_bundles/smb_bundles_1_identify.pptx
@@ -1,6 +1,6 @@
 
 <file path=ppt/presentation.xml><?xml version="1.0" encoding="utf-8"?>
-<p:presentation xmlns:ns2="http://schemas.openxmlformats.org/drawingml/2006/main" xmlns:ns3="http://schemas.microsoft.com/office/powerpoint/2012/main" xmlns:p="http://schemas.openxmlformats.org/presentationml/2006/main" xmlns:r="http://schemas.openxmlformats.org/officeDocument/2006/relationships">
+<p:presentation xmlns:a="http://schemas.openxmlformats.org/drawingml/2006/main" xmlns:r="http://schemas.openxmlformats.org/officeDocument/2006/relationships" xmlns:p="http://schemas.openxmlformats.org/presentationml/2006/main">
   <p:sldMasterIdLst>
     <p:sldMasterId id="2147483648" r:id="rId1"/>
   </p:sldMasterIdLst>
@@ -20,103 +20,103 @@
   <p:sldSz cx="12192000" cy="6858000"/>
   <p:notesSz cx="6858000" cy="9144000"/>
   <p:defaultTextStyle>
-    <ns2:defPPr>
-      <ns2:defRPr lang="en-US"/>
-    </ns2:defPPr>
-    <ns2:lvl1pPr marL="0" indent="0" algn="l" defTabSz="914400">
-      <ns2:defRPr sz="1800" kern="1200">
-        <ns2:solidFill>
-          <ns2:schemeClr val="tx1"/>
-        </ns2:solidFill>
-        <ns2:latin typeface="+mn-lt"/>
-        <ns2:ea typeface="+mn-ea"/>
-        <ns2:cs typeface="+mn-cs"/>
-      </ns2:defRPr>
-    </ns2:lvl1pPr>
-    <ns2:lvl2pPr marL="457200" indent="0" algn="l" defTabSz="914400">
-      <ns2:defRPr sz="1800" kern="1200">
-        <ns2:solidFill>
-          <ns2:schemeClr val="tx1"/>
-        </ns2:solidFill>
-        <ns2:latin typeface="+mn-lt"/>
-        <ns2:ea typeface="+mn-ea"/>
-        <ns2:cs typeface="+mn-cs"/>
-      </ns2:defRPr>
-    </ns2:lvl2pPr>
-    <ns2:lvl3pPr marL="914400" indent="0" algn="l" defTabSz="914400">
-      <ns2:defRPr sz="1800" kern="1200">
-        <ns2:solidFill>
-          <ns2:schemeClr val="tx1"/>
-        </ns2:solidFill>
-        <ns2:latin typeface="+mn-lt"/>
-        <ns2:ea typeface="+mn-ea"/>
-        <ns2:cs typeface="+mn-cs"/>
-      </ns2:defRPr>
-    </ns2:lvl3pPr>
-    <ns2:lvl4pPr marL="1371600" indent="0" algn="l" defTabSz="914400">
-      <ns2:defRPr sz="1800" kern="1200">
-        <ns2:solidFill>
-          <ns2:schemeClr val="tx1"/>
-        </ns2:solidFill>
-        <ns2:latin typeface="+mn-lt"/>
-        <ns2:ea typeface="+mn-ea"/>
-        <ns2:cs typeface="+mn-cs"/>
-      </ns2:defRPr>
-    </ns2:lvl4pPr>
-    <ns2:lvl5pPr marL="1828800" indent="0" algn="l" defTabSz="914400">
-      <ns2:defRPr sz="1800" kern="1200">
-        <ns2:solidFill>
-          <ns2:schemeClr val="tx1"/>
-        </ns2:solidFill>
-        <ns2:latin typeface="+mn-lt"/>
-        <ns2:ea typeface="+mn-ea"/>
-        <ns2:cs typeface="+mn-cs"/>
-      </ns2:defRPr>
-    </ns2:lvl5pPr>
-    <ns2:lvl6pPr marL="2286000" indent="0" algn="l" defTabSz="914400">
-      <ns2:defRPr sz="1800" kern="1200">
-        <ns2:solidFill>
-          <ns2:schemeClr val="tx1"/>
-        </ns2:solidFill>
-        <ns2:latin typeface="+mn-lt"/>
-        <ns2:ea typeface="+mn-ea"/>
-        <ns2:cs typeface="+mn-cs"/>
-      </ns2:defRPr>
-    </ns2:lvl6pPr>
-    <ns2:lvl7pPr marL="2743200" indent="0" algn="l" defTabSz="914400">
-      <ns2:defRPr sz="1800" kern="1200">
-        <ns2:solidFill>
-          <ns2:schemeClr val="tx1"/>
-        </ns2:solidFill>
-        <ns2:latin typeface="+mn-lt"/>
-        <ns2:ea typeface="+mn-ea"/>
-        <ns2:cs typeface="+mn-cs"/>
-      </ns2:defRPr>
-    </ns2:lvl7pPr>
-    <ns2:lvl8pPr marL="3200400" indent="0" algn="l" defTabSz="914400">
-      <ns2:defRPr sz="1800" kern="1200">
-        <ns2:solidFill>
-          <ns2:schemeClr val="tx1"/>
-        </ns2:solidFill>
-        <ns2:latin typeface="+mn-lt"/>
-        <ns2:ea typeface="+mn-ea"/>
-        <ns2:cs typeface="+mn-cs"/>
-      </ns2:defRPr>
-    </ns2:lvl8pPr>
-    <ns2:lvl9pPr marL="3657600" indent="0" algn="l" defTabSz="914400">
-      <ns2:defRPr sz="1800" kern="1200">
-        <ns2:solidFill>
-          <ns2:schemeClr val="tx1"/>
-        </ns2:solidFill>
-        <ns2:latin typeface="+mn-lt"/>
-        <ns2:ea typeface="+mn-ea"/>
-        <ns2:cs typeface="+mn-cs"/>
-      </ns2:defRPr>
-    </ns2:lvl9pPr>
+    <a:defPPr>
+      <a:defRPr lang="en-US"/>
+    </a:defPPr>
+    <a:lvl1pPr marL="0" indent="0" algn="l" defTabSz="914400">
+      <a:defRPr sz="1800" kern="1200">
+        <a:solidFill>
+          <a:schemeClr val="tx1"/>
+        </a:solidFill>
+        <a:latin typeface="+mn-lt"/>
+        <a:ea typeface="+mn-ea"/>
+        <a:cs typeface="+mn-cs"/>
+      </a:defRPr>
+    </a:lvl1pPr>
+    <a:lvl2pPr marL="457200" indent="0" algn="l" defTabSz="914400">
+      <a:defRPr sz="1800" kern="1200">
+        <a:solidFill>
+          <a:schemeClr val="tx1"/>
+        </a:solidFill>
+        <a:latin typeface="+mn-lt"/>
+        <a:ea typeface="+mn-ea"/>
+        <a:cs typeface="+mn-cs"/>
+      </a:defRPr>
+    </a:lvl2pPr>
+    <a:lvl3pPr marL="914400" indent="0" algn="l" defTabSz="914400">
+      <a:defRPr sz="1800" kern="1200">
+        <a:solidFill>
+          <a:schemeClr val="tx1"/>
+        </a:solidFill>
+        <a:latin typeface="+mn-lt"/>
+        <a:ea typeface="+mn-ea"/>
+        <a:cs typeface="+mn-cs"/>
+      </a:defRPr>
+    </a:lvl3pPr>
+    <a:lvl4pPr marL="1371600" indent="0" algn="l" defTabSz="914400">
+      <a:defRPr sz="1800" kern="1200">
+        <a:solidFill>
+          <a:schemeClr val="tx1"/>
+        </a:solidFill>
+        <a:latin typeface="+mn-lt"/>
+        <a:ea typeface="+mn-ea"/>
+        <a:cs typeface="+mn-cs"/>
+      </a:defRPr>
+    </a:lvl4pPr>
+    <a:lvl5pPr marL="1828800" indent="0" algn="l" defTabSz="914400">
+      <a:defRPr sz="1800" kern="1200">
+        <a:solidFill>
+          <a:schemeClr val="tx1"/>
+        </a:solidFill>
+        <a:latin typeface="+mn-lt"/>
+        <a:ea typeface="+mn-ea"/>
+        <a:cs typeface="+mn-cs"/>
+      </a:defRPr>
+    </a:lvl5pPr>
+    <a:lvl6pPr marL="2286000" indent="0" algn="l" defTabSz="914400">
+      <a:defRPr sz="1800" kern="1200">
+        <a:solidFill>
+          <a:schemeClr val="tx1"/>
+        </a:solidFill>
+        <a:latin typeface="+mn-lt"/>
+        <a:ea typeface="+mn-ea"/>
+        <a:cs typeface="+mn-cs"/>
+      </a:defRPr>
+    </a:lvl6pPr>
+    <a:lvl7pPr marL="2743200" indent="0" algn="l" defTabSz="914400">
+      <a:defRPr sz="1800" kern="1200">
+        <a:solidFill>
+          <a:schemeClr val="tx1"/>
+        </a:solidFill>
+        <a:latin typeface="+mn-lt"/>
+        <a:ea typeface="+mn-ea"/>
+        <a:cs typeface="+mn-cs"/>
+      </a:defRPr>
+    </a:lvl7pPr>
+    <a:lvl8pPr marL="3200400" indent="0" algn="l" defTabSz="914400">
+      <a:defRPr sz="1800" kern="1200">
+        <a:solidFill>
+          <a:schemeClr val="tx1"/>
+        </a:solidFill>
+        <a:latin typeface="+mn-lt"/>
+        <a:ea typeface="+mn-ea"/>
+        <a:cs typeface="+mn-cs"/>
+      </a:defRPr>
+    </a:lvl8pPr>
+    <a:lvl9pPr marL="3657600" indent="0" algn="l" defTabSz="914400">
+      <a:defRPr sz="1800" kern="1200">
+        <a:solidFill>
+          <a:schemeClr val="tx1"/>
+        </a:solidFill>
+        <a:latin typeface="+mn-lt"/>
+        <a:ea typeface="+mn-ea"/>
+        <a:cs typeface="+mn-cs"/>
+      </a:defRPr>
+    </a:lvl9pPr>
   </p:defaultTextStyle>
   <p:extLst>
     <p:ext uri="{EFAFB233-063F-42B5-8137-9DF3F51BA10A}">
-      <ns3:sldGuideLst/>
+      <p15:sldGuideLst xmlns:p15="http://schemas.microsoft.com/office/powerpoint/2012/main"/>
     </p:ext>
   </p:extLst>
 </p:presentation>
@@ -1227,7 +1227,7 @@
 </file>
 
 <file path=ppt/slides/slide1.xml><?xml version="1.0" encoding="utf-8"?>
-<p:sld xmlns:a="http://schemas.openxmlformats.org/drawingml/2006/main" xmlns:ns2="http://schemas.microsoft.com/office/drawing/2014/main" xmlns:ns3="http://schemas.microsoft.com/office/powerpoint/2010/main" xmlns:p="http://schemas.openxmlformats.org/presentationml/2006/main">
+<p:sld xmlns:a="http://schemas.openxmlformats.org/drawingml/2006/main" xmlns:r="http://schemas.openxmlformats.org/officeDocument/2006/relationships" xmlns:p="http://schemas.openxmlformats.org/presentationml/2006/main">
   <p:cSld>
     <p:bg>
       <p:bgPr>
@@ -1256,7 +1256,7 @@
           <p:cNvPr id="19" name="Straight Connector 18">
             <a:extLst>
               <a:ext uri="{FF2B5EF4-FFF2-40B4-BE49-F238E27FC236}">
-                <ns2:creationId id="{BB071BF5-761A-4556-9F3B-0C5CE095A7CC}"/>
+                <a16:creationId xmlns:a16="http://schemas.microsoft.com/office/drawing/2014/main" id="{BB071BF5-761A-4556-9F3B-0C5CE095A7CC}"/>
               </a:ext>
             </a:extLst>
           </p:cNvPr>
@@ -1292,7 +1292,7 @@
           <p:cNvPr id="3" name="Rectangle 2">
             <a:extLst>
               <a:ext uri="{FF2B5EF4-FFF2-40B4-BE49-F238E27FC236}">
-                <ns2:creationId id="{F46DEBE8-072F-477A-9844-7F7C6059950D}"/>
+                <a16:creationId xmlns:a16="http://schemas.microsoft.com/office/drawing/2014/main" id="{F46DEBE8-072F-477A-9844-7F7C6059950D}"/>
               </a:ext>
             </a:extLst>
           </p:cNvPr>
@@ -1344,7 +1344,7 @@
           <p:cNvPr id="4" name="Rectangle 3">
             <a:extLst>
               <a:ext uri="{FF2B5EF4-FFF2-40B4-BE49-F238E27FC236}">
-                <ns2:creationId id="{3902F684-A616-491F-8077-6CD2F2B79134}"/>
+                <a16:creationId xmlns:a16="http://schemas.microsoft.com/office/drawing/2014/main" id="{3902F684-A616-491F-8077-6CD2F2B79134}"/>
               </a:ext>
             </a:extLst>
           </p:cNvPr>
@@ -1388,7 +1388,7 @@
               </a:defRPr>
             </a:pPr>
             <a:r>
-              <a:rPr sz="7000" b="1">
+              <a:rPr sz="7000" b="1" dirty="0">
                 <a:solidFill>
                   <a:srgbClr val="FFD426"/>
                 </a:solidFill>
@@ -1396,19 +1396,8 @@
                 <a:ea typeface="Arial"/>
                 <a:cs typeface="Arial"/>
               </a:rPr>
-              <a:t>01</a:t>
+              <a:t>01  Identify</a:t>
             </a:r>
-            <a:r>
-              <a:rPr sz="7000" b="1">
-                <a:solidFill>
-                  <a:srgbClr val="FFD426"/>
-                </a:solidFill>
-                <a:latin typeface="Arial"/>
-                <a:ea typeface="Arial"/>
-                <a:cs typeface="Arial"/>
-              </a:rPr>
-              <a:t>  Identify</a:t>
-            </a:r>
           </a:p>
         </p:txBody>
       </p:sp>
@@ -1417,7 +1406,7 @@
           <p:cNvPr id="5" name="Rectangle 4">
             <a:extLst>
               <a:ext uri="{FF2B5EF4-FFF2-40B4-BE49-F238E27FC236}">
-                <ns2:creationId id="{E540927E-B027-400D-B31B-078BADA40D0D}"/>
+                <a16:creationId xmlns:a16="http://schemas.microsoft.com/office/drawing/2014/main" id="{E540927E-B027-400D-B31B-078BADA40D0D}"/>
               </a:ext>
             </a:extLst>
           </p:cNvPr>
@@ -1461,7 +1450,7 @@
               </a:defRPr>
             </a:pPr>
             <a:r>
-              <a:rPr sz="2200" b="0">
+              <a:rPr sz="2200" b="0" dirty="0">
                 <a:solidFill>
                   <a:srgbClr val="A7A7A7"/>
                 </a:solidFill>
@@ -1479,7 +1468,7 @@
           <p:cNvPr id="10" name="Rectangle 9">
             <a:extLst>
               <a:ext uri="{FF2B5EF4-FFF2-40B4-BE49-F238E27FC236}">
-                <ns2:creationId id="{0C6D38E9-B9E6-4C46-B738-8EF1E19E41B6}"/>
+                <a16:creationId xmlns:a16="http://schemas.microsoft.com/office/drawing/2014/main" id="{0C6D38E9-B9E6-4C46-B738-8EF1E19E41B6}"/>
               </a:ext>
             </a:extLst>
           </p:cNvPr>
@@ -1531,19 +1520,8 @@
                 <a:ea typeface="Arial"/>
                 <a:cs typeface="Arial"/>
               </a:rPr>
-              <a:t>02</a:t>
+              <a:t>02  Prioritize</a:t>
             </a:r>
-            <a:r>
-              <a:rPr sz="1900" b="1">
-                <a:solidFill>
-                  <a:srgbClr val="37AFFF"/>
-                </a:solidFill>
-                <a:latin typeface="Arial"/>
-                <a:ea typeface="Arial"/>
-                <a:cs typeface="Arial"/>
-              </a:rPr>
-              <a:t>  Prioritize</a:t>
-            </a:r>
           </a:p>
         </p:txBody>
       </p:sp>
@@ -1552,7 +1530,7 @@
           <p:cNvPr id="11" name="Rectangle 10">
             <a:extLst>
               <a:ext uri="{FF2B5EF4-FFF2-40B4-BE49-F238E27FC236}">
-                <ns2:creationId id="{5728AE2A-61C9-437D-859E-EF98C6A227C3}"/>
+                <a16:creationId xmlns:a16="http://schemas.microsoft.com/office/drawing/2014/main" id="{5728AE2A-61C9-437D-859E-EF98C6A227C3}"/>
               </a:ext>
             </a:extLst>
           </p:cNvPr>
@@ -1604,19 +1582,8 @@
                 <a:ea typeface="Arial"/>
                 <a:cs typeface="Arial"/>
               </a:rPr>
-              <a:t>03</a:t>
+              <a:t>03  Monitor</a:t>
             </a:r>
-            <a:r>
-              <a:rPr sz="1900" b="1">
-                <a:solidFill>
-                  <a:srgbClr val="38D98C"/>
-                </a:solidFill>
-                <a:latin typeface="Arial"/>
-                <a:ea typeface="Arial"/>
-                <a:cs typeface="Arial"/>
-              </a:rPr>
-              <a:t>  Monitor</a:t>
-            </a:r>
           </a:p>
         </p:txBody>
       </p:sp>
@@ -1625,7 +1592,7 @@
           <p:cNvPr id="13" name="Rectangle 12">
             <a:extLst>
               <a:ext uri="{FF2B5EF4-FFF2-40B4-BE49-F238E27FC236}">
-                <ns2:creationId id="{40427021-BCC1-4F5F-900A-65B9F1C68401}"/>
+                <a16:creationId xmlns:a16="http://schemas.microsoft.com/office/drawing/2014/main" id="{40427021-BCC1-4F5F-900A-65B9F1C68401}"/>
               </a:ext>
             </a:extLst>
           </p:cNvPr>
@@ -1677,19 +1644,8 @@
                 <a:ea typeface="Arial"/>
                 <a:cs typeface="Arial"/>
               </a:rPr>
-              <a:t>04</a:t>
+              <a:t>04  Scale</a:t>
             </a:r>
-            <a:r>
-              <a:rPr sz="1900" b="1">
-                <a:solidFill>
-                  <a:srgbClr val="FF7A59"/>
-                </a:solidFill>
-                <a:latin typeface="Arial"/>
-                <a:ea typeface="Arial"/>
-                <a:cs typeface="Arial"/>
-              </a:rPr>
-              <a:t>  Scale</a:t>
-            </a:r>
           </a:p>
         </p:txBody>
       </p:sp>
@@ -1698,7 +1654,7 @@
           <p:cNvPr id="14" name="Rectangle 13">
             <a:extLst>
               <a:ext uri="{FF2B5EF4-FFF2-40B4-BE49-F238E27FC236}">
-                <ns2:creationId id="{3F7A21B2-9BA6-4F0D-A812-589C470B8522}"/>
+                <a16:creationId xmlns:a16="http://schemas.microsoft.com/office/drawing/2014/main" id="{3F7A21B2-9BA6-4F0D-A812-589C470B8522}"/>
               </a:ext>
             </a:extLst>
           </p:cNvPr>
@@ -1741,17 +1697,7 @@
                 <a:cs typeface="Arial"/>
               </a:defRPr>
             </a:pPr>
-            <a:r>
-              <a:rPr sz="100" b="0">
-                <a:solidFill>
-                  <a:srgbClr val="A7A7A7"/>
-                </a:solidFill>
-                <a:latin typeface="Arial"/>
-                <a:ea typeface="Arial"/>
-                <a:cs typeface="Arial"/>
-              </a:rPr>
-              <a:t/>
-            </a:r>
+            <a:endParaRPr/>
           </a:p>
         </p:txBody>
       </p:sp>
@@ -1760,7 +1706,7 @@
           <p:cNvPr id="16" name="Rectangle 15">
             <a:extLst>
               <a:ext uri="{FF2B5EF4-FFF2-40B4-BE49-F238E27FC236}">
-                <ns2:creationId id="{744DD1BE-D7B7-4AB2-A51B-3A87F8328BF1}"/>
+                <a16:creationId xmlns:a16="http://schemas.microsoft.com/office/drawing/2014/main" id="{744DD1BE-D7B7-4AB2-A51B-3A87F8328BF1}"/>
               </a:ext>
             </a:extLst>
           </p:cNvPr>
@@ -1803,17 +1749,7 @@
                 <a:cs typeface="Arial"/>
               </a:defRPr>
             </a:pPr>
-            <a:r>
-              <a:rPr sz="100" b="0">
-                <a:solidFill>
-                  <a:srgbClr val="A7A7A7"/>
-                </a:solidFill>
-                <a:latin typeface="Arial"/>
-                <a:ea typeface="Arial"/>
-                <a:cs typeface="Arial"/>
-              </a:rPr>
-              <a:t/>
-            </a:r>
+            <a:endParaRPr/>
           </a:p>
         </p:txBody>
       </p:sp>
@@ -1822,7 +1758,7 @@
           <p:cNvPr id="17" name="Rectangle 16">
             <a:extLst>
               <a:ext uri="{FF2B5EF4-FFF2-40B4-BE49-F238E27FC236}">
-                <ns2:creationId id="{C2158E59-14EB-45A1-9413-A253C841559B}"/>
+                <a16:creationId xmlns:a16="http://schemas.microsoft.com/office/drawing/2014/main" id="{C2158E59-14EB-45A1-9413-A253C841559B}"/>
               </a:ext>
             </a:extLst>
           </p:cNvPr>
@@ -1865,56 +1801,76 @@
                 <a:cs typeface="Arial"/>
               </a:defRPr>
             </a:pPr>
+            <a:endParaRPr/>
+          </a:p>
+        </p:txBody>
+      </p:sp>
+      <p:sp>
+        <p:nvSpPr>
+          <p:cNvPr id="7" name="Text">
+            <a:extLst>
+              <a:ext uri="{FF2B5EF4-FFF2-40B4-BE49-F238E27FC236}">
+                <a16:creationId xmlns:a16="http://schemas.microsoft.com/office/drawing/2014/main" id="{639743E6-45F5-5FCD-A928-9E2EA9A5B01C}"/>
+              </a:ext>
+            </a:extLst>
+          </p:cNvPr>
+          <p:cNvSpPr>
+            <a:spLocks noGrp="1"/>
+          </p:cNvSpPr>
+          <p:nvPr/>
+        </p:nvSpPr>
+        <p:spPr>
+          <a:xfrm>
+            <a:off x="11146536" y="6291072"/>
+            <a:ext cx="590550" cy="228600"/>
+          </a:xfrm>
+          <a:prstGeom prst="rect">
+            <a:avLst/>
+          </a:prstGeom>
+          <a:ln w="0">
+            <a:solidFill>
+              <a:srgbClr val="000000">
+                <a:alpha val="0"/>
+              </a:srgbClr>
+            </a:solidFill>
+          </a:ln>
+        </p:spPr>
+        <p:txBody>
+          <a:bodyPr lIns="57150" tIns="38100" rIns="57150" bIns="38100" anchor="t"/>
+          <a:lstStyle/>
+          <a:p>
+            <a:pPr algn="r">
+              <a:buNone/>
+              <a:defRPr sz="900" b="0">
+                <a:solidFill>
+                  <a:srgbClr val="A5A5A5"/>
+                </a:solidFill>
+                <a:latin typeface="Arial"/>
+                <a:ea typeface="Arial"/>
+                <a:cs typeface="Arial"/>
+              </a:defRPr>
+            </a:pPr>
             <a:r>
-              <a:rPr sz="100" b="0">
-                <a:solidFill>
-                  <a:srgbClr val="A7A7A7"/>
+              <a:rPr lang="en-US" sz="900" b="0" dirty="0">
+                <a:solidFill>
+                  <a:srgbClr val="A5A5A5"/>
                 </a:solidFill>
                 <a:latin typeface="Arial"/>
                 <a:ea typeface="Arial"/>
                 <a:cs typeface="Arial"/>
               </a:rPr>
-              <a:t/>
+              <a:t>01</a:t>
             </a:r>
-          </a:p>
-        </p:txBody>
-      </p:sp>
-      <p:sp>
-        <p:nvSpPr>
-          <p:cNvPr id="101" name="Q1 preview page marker"/>
-          <p:cNvSpPr>
-            <a:spLocks noGrp="1"/>
-          </p:cNvSpPr>
-          <p:nvPr/>
-        </p:nvSpPr>
-        <p:spPr>
-          <a:xfrm>
-            <a:off x="10744200" y="6286500"/>
-            <a:ext cx="990600" cy="228600"/>
-          </a:xfrm>
-          <a:prstGeom prst="rect">
-            <a:avLst/>
-          </a:prstGeom>
-          <a:noFill/>
-          <a:ln w="0">
-            <a:noFill/>
-          </a:ln>
-        </p:spPr>
-        <p:txBody>
-          <a:bodyPr/>
-          <a:lstStyle/>
-          <a:p>
-            <a:pPr algn="r"/>
             <a:r>
-              <a:rPr sz="950" b="0">
-                <a:solidFill>
-                  <a:srgbClr val="A7A7A7"/>
+              <a:rPr sz="900" b="0" dirty="0">
+                <a:solidFill>
+                  <a:srgbClr val="A5A5A5"/>
                 </a:solidFill>
                 <a:latin typeface="Arial"/>
                 <a:ea typeface="Arial"/>
                 <a:cs typeface="Arial"/>
               </a:rPr>
-              <a:t>01 / 08</a:t>
+              <a:t> / 08</a:t>
             </a:r>
           </a:p>
         </p:txBody>
@@ -1922,7 +1878,7 @@
     </p:spTree>
     <p:extLst>
       <p:ext uri="{BB962C8B-B14F-4D97-AF65-F5344CB8AC3E}">
-        <ns3:creationId val="1878440351"/>
+        <p14:creationId xmlns:p14="http://schemas.microsoft.com/office/powerpoint/2010/main" val="1878440351"/>
       </p:ext>
     </p:extLst>
   </p:cSld>
@@ -1933,7 +1889,7 @@
 </file>
 
 <file path=ppt/slides/slide2.xml><?xml version="1.0" encoding="utf-8"?>
-<p:sld xmlns:a="http://schemas.openxmlformats.org/drawingml/2006/main" xmlns:ns2="http://schemas.microsoft.com/office/drawing/2014/main" xmlns:ns3="http://schemas.microsoft.com/office/powerpoint/2010/main" xmlns:p="http://schemas.openxmlformats.org/presentationml/2006/main">
+<p:sld xmlns:a="http://schemas.openxmlformats.org/drawingml/2006/main" xmlns:r="http://schemas.openxmlformats.org/officeDocument/2006/relationships" xmlns:p="http://schemas.openxmlformats.org/presentationml/2006/main">
   <p:cSld>
     <p:bg>
       <p:bgPr>
@@ -1962,7 +1918,7 @@
           <p:cNvPr id="2" name="Text">
             <a:extLst>
               <a:ext uri="{FF2B5EF4-FFF2-40B4-BE49-F238E27FC236}">
-                <ns2:creationId id="{18E998B9-F88E-4699-A13C-0F116878D7DE}"/>
+                <a16:creationId xmlns:a16="http://schemas.microsoft.com/office/drawing/2014/main" id="{18E998B9-F88E-4699-A13C-0F116878D7DE}"/>
               </a:ext>
             </a:extLst>
           </p:cNvPr>
@@ -2021,7 +1977,7 @@
           <p:cNvPr id="3" name="Text">
             <a:extLst>
               <a:ext uri="{FF2B5EF4-FFF2-40B4-BE49-F238E27FC236}">
-                <ns2:creationId id="{0518099F-4F90-437E-8EBF-7E40973988EF}"/>
+                <a16:creationId xmlns:a16="http://schemas.microsoft.com/office/drawing/2014/main" id="{0518099F-4F90-437E-8EBF-7E40973988EF}"/>
               </a:ext>
             </a:extLst>
           </p:cNvPr>
@@ -2080,7 +2036,7 @@
           <p:cNvPr id="4" name="Divider">
             <a:extLst>
               <a:ext uri="{FF2B5EF4-FFF2-40B4-BE49-F238E27FC236}">
-                <ns2:creationId id="{CC4322F5-8965-4F7E-88FF-C8024590E0E5}"/>
+                <a16:creationId xmlns:a16="http://schemas.microsoft.com/office/drawing/2014/main" id="{CC4322F5-8965-4F7E-88FF-C8024590E0E5}"/>
               </a:ext>
             </a:extLst>
           </p:cNvPr>
@@ -2116,7 +2072,7 @@
           <p:cNvPr id="6" name="Divider">
             <a:extLst>
               <a:ext uri="{FF2B5EF4-FFF2-40B4-BE49-F238E27FC236}">
-                <ns2:creationId id="{AEADAF99-75EE-4B6D-9374-F558920C9DF2}"/>
+                <a16:creationId xmlns:a16="http://schemas.microsoft.com/office/drawing/2014/main" id="{AEADAF99-75EE-4B6D-9374-F558920C9DF2}"/>
               </a:ext>
             </a:extLst>
           </p:cNvPr>
@@ -2152,7 +2108,7 @@
           <p:cNvPr id="7" name="Text">
             <a:extLst>
               <a:ext uri="{FF2B5EF4-FFF2-40B4-BE49-F238E27FC236}">
-                <ns2:creationId id="{70C0DF54-E1E1-4B31-AE44-37C300A4C506}"/>
+                <a16:creationId xmlns:a16="http://schemas.microsoft.com/office/drawing/2014/main" id="{70C0DF54-E1E1-4B31-AE44-37C300A4C506}"/>
               </a:ext>
             </a:extLst>
           </p:cNvPr>
@@ -2211,18 +2167,18 @@
           <p:cNvPr id="8" name="Text">
             <a:extLst>
               <a:ext uri="{FF2B5EF4-FFF2-40B4-BE49-F238E27FC236}">
-                <ns2:creationId id="{AB90A983-65B5-4926-8687-4CC0E482D0D9}"/>
-              </a:ext>
-            </a:extLst>
-          </p:cNvPr>
-          <p:cNvSpPr>
-            <a:spLocks noGrp="1"/>
-          </p:cNvSpPr>
-          <p:nvPr/>
-        </p:nvSpPr>
-        <p:spPr>
-          <a:xfrm>
-            <a:off x="11144250" y="6286500"/>
+                <a16:creationId xmlns:a16="http://schemas.microsoft.com/office/drawing/2014/main" id="{AB90A983-65B5-4926-8687-4CC0E482D0D9}"/>
+              </a:ext>
+            </a:extLst>
+          </p:cNvPr>
+          <p:cNvSpPr>
+            <a:spLocks noGrp="1"/>
+          </p:cNvSpPr>
+          <p:nvPr/>
+        </p:nvSpPr>
+        <p:spPr>
+          <a:xfrm>
+            <a:off x="11146536" y="6291072"/>
             <a:ext cx="590550" cy="228600"/>
           </a:xfrm>
           <a:prstGeom prst="rect">
@@ -2252,7 +2208,7 @@
               </a:defRPr>
             </a:pPr>
             <a:r>
-              <a:rPr sz="900" b="0">
+              <a:rPr sz="900" b="0" dirty="0">
                 <a:solidFill>
                   <a:srgbClr val="A5A5A5"/>
                 </a:solidFill>
@@ -2270,7 +2226,7 @@
           <p:cNvPr id="9" name="Framing intro">
             <a:extLst>
               <a:ext uri="{FF2B5EF4-FFF2-40B4-BE49-F238E27FC236}">
-                <ns2:creationId id="{9193F9C6-41EE-4080-99E5-19D607DB5747}"/>
+                <a16:creationId xmlns:a16="http://schemas.microsoft.com/office/drawing/2014/main" id="{9193F9C6-41EE-4080-99E5-19D607DB5747}"/>
               </a:ext>
             </a:extLst>
           </p:cNvPr>
@@ -2314,7 +2270,7 @@
           <p:cNvPr id="10" name="Signal Map label">
             <a:extLst>
               <a:ext uri="{FF2B5EF4-FFF2-40B4-BE49-F238E27FC236}">
-                <ns2:creationId id="{2178FA77-A0E9-4651-8A84-AC52DF717621}"/>
+                <a16:creationId xmlns:a16="http://schemas.microsoft.com/office/drawing/2014/main" id="{2178FA77-A0E9-4651-8A84-AC52DF717621}"/>
               </a:ext>
             </a:extLst>
           </p:cNvPr>
@@ -2358,7 +2314,7 @@
           <p:cNvPr id="11" name="Business Setup card">
             <a:extLst>
               <a:ext uri="{FF2B5EF4-FFF2-40B4-BE49-F238E27FC236}">
-                <ns2:creationId id="{C7FFC7DF-4E61-4CE4-A6F2-33430D7E3FA1}"/>
+                <a16:creationId xmlns:a16="http://schemas.microsoft.com/office/drawing/2014/main" id="{C7FFC7DF-4E61-4CE4-A6F2-33430D7E3FA1}"/>
               </a:ext>
             </a:extLst>
           </p:cNvPr>
@@ -2397,7 +2353,7 @@
           <p:cNvPr id="12" name="Business Setup accent">
             <a:extLst>
               <a:ext uri="{FF2B5EF4-FFF2-40B4-BE49-F238E27FC236}">
-                <ns2:creationId id="{8F8E834F-FE5B-4DC9-8932-DFDC03636BDE}"/>
+                <a16:creationId xmlns:a16="http://schemas.microsoft.com/office/drawing/2014/main" id="{8F8E834F-FE5B-4DC9-8932-DFDC03636BDE}"/>
               </a:ext>
             </a:extLst>
           </p:cNvPr>
@@ -2439,7 +2395,7 @@
           <p:cNvPr id="13" name="Business Setup title">
             <a:extLst>
               <a:ext uri="{FF2B5EF4-FFF2-40B4-BE49-F238E27FC236}">
-                <ns2:creationId id="{7D9E8E70-5B22-4E93-9701-BDB2FB316955}"/>
+                <a16:creationId xmlns:a16="http://schemas.microsoft.com/office/drawing/2014/main" id="{7D9E8E70-5B22-4E93-9701-BDB2FB316955}"/>
               </a:ext>
             </a:extLst>
           </p:cNvPr>
@@ -2494,7 +2450,7 @@
           <p:cNvPr id="14" name="Signal bullet">
             <a:extLst>
               <a:ext uri="{FF2B5EF4-FFF2-40B4-BE49-F238E27FC236}">
-                <ns2:creationId id="{7B56A51E-5F3E-422F-80C4-58E8EE88FB23}"/>
+                <a16:creationId xmlns:a16="http://schemas.microsoft.com/office/drawing/2014/main" id="{7B56A51E-5F3E-422F-80C4-58E8EE88FB23}"/>
               </a:ext>
             </a:extLst>
           </p:cNvPr>
@@ -2531,7 +2487,7 @@
           <p:cNvPr id="15" name="Business Setup item">
             <a:extLst>
               <a:ext uri="{FF2B5EF4-FFF2-40B4-BE49-F238E27FC236}">
-                <ns2:creationId id="{B4FC3418-FD5C-45BD-AC2C-BC074CB59259}"/>
+                <a16:creationId xmlns:a16="http://schemas.microsoft.com/office/drawing/2014/main" id="{B4FC3418-FD5C-45BD-AC2C-BC074CB59259}"/>
               </a:ext>
             </a:extLst>
           </p:cNvPr>
@@ -2575,7 +2531,7 @@
           <p:cNvPr id="16" name="Signal bullet">
             <a:extLst>
               <a:ext uri="{FF2B5EF4-FFF2-40B4-BE49-F238E27FC236}">
-                <ns2:creationId id="{B14A1CE9-D141-4F64-A7EF-D4B4BF92A59E}"/>
+                <a16:creationId xmlns:a16="http://schemas.microsoft.com/office/drawing/2014/main" id="{B14A1CE9-D141-4F64-A7EF-D4B4BF92A59E}"/>
               </a:ext>
             </a:extLst>
           </p:cNvPr>
@@ -2612,7 +2568,7 @@
           <p:cNvPr id="17" name="Business Setup item">
             <a:extLst>
               <a:ext uri="{FF2B5EF4-FFF2-40B4-BE49-F238E27FC236}">
-                <ns2:creationId id="{B469ED38-7D8B-4DE8-9700-530B606571D5}"/>
+                <a16:creationId xmlns:a16="http://schemas.microsoft.com/office/drawing/2014/main" id="{B469ED38-7D8B-4DE8-9700-530B606571D5}"/>
               </a:ext>
             </a:extLst>
           </p:cNvPr>
@@ -2656,7 +2612,7 @@
           <p:cNvPr id="18" name="Paid Usage card">
             <a:extLst>
               <a:ext uri="{FF2B5EF4-FFF2-40B4-BE49-F238E27FC236}">
-                <ns2:creationId id="{A9DCA840-A6C9-4825-B340-E7CC272C1A10}"/>
+                <a16:creationId xmlns:a16="http://schemas.microsoft.com/office/drawing/2014/main" id="{A9DCA840-A6C9-4825-B340-E7CC272C1A10}"/>
               </a:ext>
             </a:extLst>
           </p:cNvPr>
@@ -2695,7 +2651,7 @@
           <p:cNvPr id="19" name="Paid Usage accent">
             <a:extLst>
               <a:ext uri="{FF2B5EF4-FFF2-40B4-BE49-F238E27FC236}">
-                <ns2:creationId id="{222202EB-5AE5-42B9-82C0-54215292C2FF}"/>
+                <a16:creationId xmlns:a16="http://schemas.microsoft.com/office/drawing/2014/main" id="{222202EB-5AE5-42B9-82C0-54215292C2FF}"/>
               </a:ext>
             </a:extLst>
           </p:cNvPr>
@@ -2734,7 +2690,7 @@
           <p:cNvPr id="20" name="Paid Usage title">
             <a:extLst>
               <a:ext uri="{FF2B5EF4-FFF2-40B4-BE49-F238E27FC236}">
-                <ns2:creationId id="{72DD9E6A-2D90-447E-9783-0FC7A11F6365}"/>
+                <a16:creationId xmlns:a16="http://schemas.microsoft.com/office/drawing/2014/main" id="{72DD9E6A-2D90-447E-9783-0FC7A11F6365}"/>
               </a:ext>
             </a:extLst>
           </p:cNvPr>
@@ -2789,7 +2745,7 @@
           <p:cNvPr id="21" name="Signal bullet">
             <a:extLst>
               <a:ext uri="{FF2B5EF4-FFF2-40B4-BE49-F238E27FC236}">
-                <ns2:creationId id="{CA725DE6-45B1-4EFE-B3C9-EF75F8B52A9A}"/>
+                <a16:creationId xmlns:a16="http://schemas.microsoft.com/office/drawing/2014/main" id="{CA725DE6-45B1-4EFE-B3C9-EF75F8B52A9A}"/>
               </a:ext>
             </a:extLst>
           </p:cNvPr>
@@ -2826,7 +2782,7 @@
           <p:cNvPr id="22" name="Paid Usage item">
             <a:extLst>
               <a:ext uri="{FF2B5EF4-FFF2-40B4-BE49-F238E27FC236}">
-                <ns2:creationId id="{0675CBDE-5BDB-4CA7-ABBF-BA7C7327CCA2}"/>
+                <a16:creationId xmlns:a16="http://schemas.microsoft.com/office/drawing/2014/main" id="{0675CBDE-5BDB-4CA7-ABBF-BA7C7327CCA2}"/>
               </a:ext>
             </a:extLst>
           </p:cNvPr>
@@ -2870,7 +2826,7 @@
           <p:cNvPr id="23" name="Signal bullet">
             <a:extLst>
               <a:ext uri="{FF2B5EF4-FFF2-40B4-BE49-F238E27FC236}">
-                <ns2:creationId id="{21856CE8-A264-4587-95B3-029FD2FBDEDD}"/>
+                <a16:creationId xmlns:a16="http://schemas.microsoft.com/office/drawing/2014/main" id="{21856CE8-A264-4587-95B3-029FD2FBDEDD}"/>
               </a:ext>
             </a:extLst>
           </p:cNvPr>
@@ -2907,7 +2863,7 @@
           <p:cNvPr id="24" name="Paid Usage item">
             <a:extLst>
               <a:ext uri="{FF2B5EF4-FFF2-40B4-BE49-F238E27FC236}">
-                <ns2:creationId id="{77ECC5B7-96DB-4BA4-BF5D-832D68C65387}"/>
+                <a16:creationId xmlns:a16="http://schemas.microsoft.com/office/drawing/2014/main" id="{77ECC5B7-96DB-4BA4-BF5D-832D68C65387}"/>
               </a:ext>
             </a:extLst>
           </p:cNvPr>
@@ -2951,7 +2907,7 @@
           <p:cNvPr id="25" name="Seller Activity card">
             <a:extLst>
               <a:ext uri="{FF2B5EF4-FFF2-40B4-BE49-F238E27FC236}">
-                <ns2:creationId id="{7987C853-D92F-4CCE-9116-518E7F87387D}"/>
+                <a16:creationId xmlns:a16="http://schemas.microsoft.com/office/drawing/2014/main" id="{7987C853-D92F-4CCE-9116-518E7F87387D}"/>
               </a:ext>
             </a:extLst>
           </p:cNvPr>
@@ -2990,7 +2946,7 @@
           <p:cNvPr id="26" name="Seller Activity accent">
             <a:extLst>
               <a:ext uri="{FF2B5EF4-FFF2-40B4-BE49-F238E27FC236}">
-                <ns2:creationId id="{3687BD4C-7470-40F1-98B1-0268824BAB61}"/>
+                <a16:creationId xmlns:a16="http://schemas.microsoft.com/office/drawing/2014/main" id="{3687BD4C-7470-40F1-98B1-0268824BAB61}"/>
               </a:ext>
             </a:extLst>
           </p:cNvPr>
@@ -3029,7 +2985,7 @@
           <p:cNvPr id="27" name="Seller Activity title">
             <a:extLst>
               <a:ext uri="{FF2B5EF4-FFF2-40B4-BE49-F238E27FC236}">
-                <ns2:creationId id="{FFDD1A22-E70D-454D-8D01-B7C064F06203}"/>
+                <a16:creationId xmlns:a16="http://schemas.microsoft.com/office/drawing/2014/main" id="{FFDD1A22-E70D-454D-8D01-B7C064F06203}"/>
               </a:ext>
             </a:extLst>
           </p:cNvPr>
@@ -3073,7 +3029,7 @@
           <p:cNvPr id="28" name="Signal bullet">
             <a:extLst>
               <a:ext uri="{FF2B5EF4-FFF2-40B4-BE49-F238E27FC236}">
-                <ns2:creationId id="{144F21A3-D738-452D-AAE6-160D2E809261}"/>
+                <a16:creationId xmlns:a16="http://schemas.microsoft.com/office/drawing/2014/main" id="{144F21A3-D738-452D-AAE6-160D2E809261}"/>
               </a:ext>
             </a:extLst>
           </p:cNvPr>
@@ -3110,7 +3066,7 @@
           <p:cNvPr id="29" name="Seller Activity item">
             <a:extLst>
               <a:ext uri="{FF2B5EF4-FFF2-40B4-BE49-F238E27FC236}">
-                <ns2:creationId id="{49F3CCD9-43DB-4DF4-9E52-3895C28C1A51}"/>
+                <a16:creationId xmlns:a16="http://schemas.microsoft.com/office/drawing/2014/main" id="{49F3CCD9-43DB-4DF4-9E52-3895C28C1A51}"/>
               </a:ext>
             </a:extLst>
           </p:cNvPr>
@@ -3154,7 +3110,7 @@
           <p:cNvPr id="30" name="Signal bullet">
             <a:extLst>
               <a:ext uri="{FF2B5EF4-FFF2-40B4-BE49-F238E27FC236}">
-                <ns2:creationId id="{8BC7A4E6-11F4-43B9-9D4F-3980FAEC70AE}"/>
+                <a16:creationId xmlns:a16="http://schemas.microsoft.com/office/drawing/2014/main" id="{8BC7A4E6-11F4-43B9-9D4F-3980FAEC70AE}"/>
               </a:ext>
             </a:extLst>
           </p:cNvPr>
@@ -3191,7 +3147,7 @@
           <p:cNvPr id="31" name="Seller Activity item">
             <a:extLst>
               <a:ext uri="{FF2B5EF4-FFF2-40B4-BE49-F238E27FC236}">
-                <ns2:creationId id="{0E9B555A-9C31-4082-A516-9A9DEA35A176}"/>
+                <a16:creationId xmlns:a16="http://schemas.microsoft.com/office/drawing/2014/main" id="{0E9B555A-9C31-4082-A516-9A9DEA35A176}"/>
               </a:ext>
             </a:extLst>
           </p:cNvPr>
@@ -3235,7 +3191,7 @@
           <p:cNvPr id="32" name="Category Focus card">
             <a:extLst>
               <a:ext uri="{FF2B5EF4-FFF2-40B4-BE49-F238E27FC236}">
-                <ns2:creationId id="{D71119D6-85B8-4430-A6E9-786092D0560B}"/>
+                <a16:creationId xmlns:a16="http://schemas.microsoft.com/office/drawing/2014/main" id="{D71119D6-85B8-4430-A6E9-786092D0560B}"/>
               </a:ext>
             </a:extLst>
           </p:cNvPr>
@@ -3274,7 +3230,7 @@
           <p:cNvPr id="33" name="Category Focus accent">
             <a:extLst>
               <a:ext uri="{FF2B5EF4-FFF2-40B4-BE49-F238E27FC236}">
-                <ns2:creationId id="{2E0A62FB-C9A0-4046-BEBC-07C6A8EEC3A6}"/>
+                <a16:creationId xmlns:a16="http://schemas.microsoft.com/office/drawing/2014/main" id="{2E0A62FB-C9A0-4046-BEBC-07C6A8EEC3A6}"/>
               </a:ext>
             </a:extLst>
           </p:cNvPr>
@@ -3313,7 +3269,7 @@
           <p:cNvPr id="34" name="Category Focus title">
             <a:extLst>
               <a:ext uri="{FF2B5EF4-FFF2-40B4-BE49-F238E27FC236}">
-                <ns2:creationId id="{928DC57C-FE56-4CCB-90DA-5D3CC59B5756}"/>
+                <a16:creationId xmlns:a16="http://schemas.microsoft.com/office/drawing/2014/main" id="{928DC57C-FE56-4CCB-90DA-5D3CC59B5756}"/>
               </a:ext>
             </a:extLst>
           </p:cNvPr>
@@ -3368,7 +3324,7 @@
           <p:cNvPr id="35" name="Signal bullet">
             <a:extLst>
               <a:ext uri="{FF2B5EF4-FFF2-40B4-BE49-F238E27FC236}">
-                <ns2:creationId id="{7A6351F8-4C68-48D0-B0B9-9D66CF8A3D68}"/>
+                <a16:creationId xmlns:a16="http://schemas.microsoft.com/office/drawing/2014/main" id="{7A6351F8-4C68-48D0-B0B9-9D66CF8A3D68}"/>
               </a:ext>
             </a:extLst>
           </p:cNvPr>
@@ -3405,7 +3361,7 @@
           <p:cNvPr id="36" name="Category Focus item">
             <a:extLst>
               <a:ext uri="{FF2B5EF4-FFF2-40B4-BE49-F238E27FC236}">
-                <ns2:creationId id="{B1A97181-513A-4A9F-A03F-DD5DB8ED741A}"/>
+                <a16:creationId xmlns:a16="http://schemas.microsoft.com/office/drawing/2014/main" id="{B1A97181-513A-4A9F-A03F-DD5DB8ED741A}"/>
               </a:ext>
             </a:extLst>
           </p:cNvPr>
@@ -3449,7 +3405,7 @@
           <p:cNvPr id="37" name="Signal bullet">
             <a:extLst>
               <a:ext uri="{FF2B5EF4-FFF2-40B4-BE49-F238E27FC236}">
-                <ns2:creationId id="{3BE1C13B-6D87-4F60-9FC9-A66B16638F60}"/>
+                <a16:creationId xmlns:a16="http://schemas.microsoft.com/office/drawing/2014/main" id="{3BE1C13B-6D87-4F60-9FC9-A66B16638F60}"/>
               </a:ext>
             </a:extLst>
           </p:cNvPr>
@@ -3486,7 +3442,7 @@
           <p:cNvPr id="38" name="Category Focus item">
             <a:extLst>
               <a:ext uri="{FF2B5EF4-FFF2-40B4-BE49-F238E27FC236}">
-                <ns2:creationId id="{0C6E2724-9D5D-4507-85DB-BC4B505BB9E6}"/>
+                <a16:creationId xmlns:a16="http://schemas.microsoft.com/office/drawing/2014/main" id="{0C6E2724-9D5D-4507-85DB-BC4B505BB9E6}"/>
               </a:ext>
             </a:extLst>
           </p:cNvPr>
@@ -3530,7 +3486,7 @@
           <p:cNvPr id="39" name="Buyer Demand card">
             <a:extLst>
               <a:ext uri="{FF2B5EF4-FFF2-40B4-BE49-F238E27FC236}">
-                <ns2:creationId id="{9664A2EA-0669-4FE7-831D-A0CC724AC0E5}"/>
+                <a16:creationId xmlns:a16="http://schemas.microsoft.com/office/drawing/2014/main" id="{9664A2EA-0669-4FE7-831D-A0CC724AC0E5}"/>
               </a:ext>
             </a:extLst>
           </p:cNvPr>
@@ -3569,7 +3525,7 @@
           <p:cNvPr id="40" name="Buyer Demand accent">
             <a:extLst>
               <a:ext uri="{FF2B5EF4-FFF2-40B4-BE49-F238E27FC236}">
-                <ns2:creationId id="{254B3EC9-675A-4691-AF61-ED63169A3219}"/>
+                <a16:creationId xmlns:a16="http://schemas.microsoft.com/office/drawing/2014/main" id="{254B3EC9-675A-4691-AF61-ED63169A3219}"/>
               </a:ext>
             </a:extLst>
           </p:cNvPr>
@@ -3608,7 +3564,7 @@
           <p:cNvPr id="41" name="Buyer Demand title">
             <a:extLst>
               <a:ext uri="{FF2B5EF4-FFF2-40B4-BE49-F238E27FC236}">
-                <ns2:creationId id="{F7C8B1E1-852F-4C6C-83A5-EB56C896C9E0}"/>
+                <a16:creationId xmlns:a16="http://schemas.microsoft.com/office/drawing/2014/main" id="{F7C8B1E1-852F-4C6C-83A5-EB56C896C9E0}"/>
               </a:ext>
             </a:extLst>
           </p:cNvPr>
@@ -3663,7 +3619,7 @@
           <p:cNvPr id="42" name="Signal bullet">
             <a:extLst>
               <a:ext uri="{FF2B5EF4-FFF2-40B4-BE49-F238E27FC236}">
-                <ns2:creationId id="{29AAEA38-388B-4218-AF99-760F3ACB07B3}"/>
+                <a16:creationId xmlns:a16="http://schemas.microsoft.com/office/drawing/2014/main" id="{29AAEA38-388B-4218-AF99-760F3ACB07B3}"/>
               </a:ext>
             </a:extLst>
           </p:cNvPr>
@@ -3700,7 +3656,7 @@
           <p:cNvPr id="43" name="Buyer Demand item">
             <a:extLst>
               <a:ext uri="{FF2B5EF4-FFF2-40B4-BE49-F238E27FC236}">
-                <ns2:creationId id="{6EF00164-93C6-4F9D-A165-828EA0E36D9A}"/>
+                <a16:creationId xmlns:a16="http://schemas.microsoft.com/office/drawing/2014/main" id="{6EF00164-93C6-4F9D-A165-828EA0E36D9A}"/>
               </a:ext>
             </a:extLst>
           </p:cNvPr>
@@ -3744,7 +3700,7 @@
           <p:cNvPr id="44" name="Signal bullet">
             <a:extLst>
               <a:ext uri="{FF2B5EF4-FFF2-40B4-BE49-F238E27FC236}">
-                <ns2:creationId id="{25757DBF-E54D-41B9-8864-36A3772C014F}"/>
+                <a16:creationId xmlns:a16="http://schemas.microsoft.com/office/drawing/2014/main" id="{25757DBF-E54D-41B9-8864-36A3772C014F}"/>
               </a:ext>
             </a:extLst>
           </p:cNvPr>
@@ -3781,7 +3737,7 @@
           <p:cNvPr id="45" name="Buyer Demand item">
             <a:extLst>
               <a:ext uri="{FF2B5EF4-FFF2-40B4-BE49-F238E27FC236}">
-                <ns2:creationId id="{C27D2C33-21D5-4658-8E6A-35747344CF5E}"/>
+                <a16:creationId xmlns:a16="http://schemas.microsoft.com/office/drawing/2014/main" id="{C27D2C33-21D5-4658-8E6A-35747344CF5E}"/>
               </a:ext>
             </a:extLst>
           </p:cNvPr>
@@ -3825,7 +3781,7 @@
           <p:cNvPr id="46" name="Scoring Flow label">
             <a:extLst>
               <a:ext uri="{FF2B5EF4-FFF2-40B4-BE49-F238E27FC236}">
-                <ns2:creationId id="{47D1F815-DDE6-4E60-B387-97C475589306}"/>
+                <a16:creationId xmlns:a16="http://schemas.microsoft.com/office/drawing/2014/main" id="{47D1F815-DDE6-4E60-B387-97C475589306}"/>
               </a:ext>
             </a:extLst>
           </p:cNvPr>
@@ -3869,7 +3825,7 @@
           <p:cNvPr id="47" name="Raw seller data flow node">
             <a:extLst>
               <a:ext uri="{FF2B5EF4-FFF2-40B4-BE49-F238E27FC236}">
-                <ns2:creationId id="{228E9DF1-5F1B-4E06-8A4C-6A9D6C33C93F}"/>
+                <a16:creationId xmlns:a16="http://schemas.microsoft.com/office/drawing/2014/main" id="{228E9DF1-5F1B-4E06-8A4C-6A9D6C33C93F}"/>
               </a:ext>
             </a:extLst>
           </p:cNvPr>
@@ -3908,7 +3864,7 @@
           <p:cNvPr id="48" name="Raw seller data flow title">
             <a:extLst>
               <a:ext uri="{FF2B5EF4-FFF2-40B4-BE49-F238E27FC236}">
-                <ns2:creationId id="{FF9E5EFA-46E4-483C-A6BB-AE380FEFF886}"/>
+                <a16:creationId xmlns:a16="http://schemas.microsoft.com/office/drawing/2014/main" id="{FF9E5EFA-46E4-483C-A6BB-AE380FEFF886}"/>
               </a:ext>
             </a:extLst>
           </p:cNvPr>
@@ -3952,7 +3908,7 @@
           <p:cNvPr id="49" name="Raw seller data flow sub">
             <a:extLst>
               <a:ext uri="{FF2B5EF4-FFF2-40B4-BE49-F238E27FC236}">
-                <ns2:creationId id="{02C0D121-F20E-4F14-94E4-E0106269114C}"/>
+                <a16:creationId xmlns:a16="http://schemas.microsoft.com/office/drawing/2014/main" id="{02C0D121-F20E-4F14-94E4-E0106269114C}"/>
               </a:ext>
             </a:extLst>
           </p:cNvPr>
@@ -3996,7 +3952,7 @@
           <p:cNvPr id="50" name="Scoring flow arrow">
             <a:extLst>
               <a:ext uri="{FF2B5EF4-FFF2-40B4-BE49-F238E27FC236}">
-                <ns2:creationId id="{3210E315-A08C-47C2-881C-A1F7D60DCD59}"/>
+                <a16:creationId xmlns:a16="http://schemas.microsoft.com/office/drawing/2014/main" id="{3210E315-A08C-47C2-881C-A1F7D60DCD59}"/>
               </a:ext>
             </a:extLst>
           </p:cNvPr>
@@ -4036,7 +3992,7 @@
           <p:cNvPr id="51" name="Seller-level signals flow node">
             <a:extLst>
               <a:ext uri="{FF2B5EF4-FFF2-40B4-BE49-F238E27FC236}">
-                <ns2:creationId id="{F5E6095A-6A9C-49F3-A97B-339B96C4F048}"/>
+                <a16:creationId xmlns:a16="http://schemas.microsoft.com/office/drawing/2014/main" id="{F5E6095A-6A9C-49F3-A97B-339B96C4F048}"/>
               </a:ext>
             </a:extLst>
           </p:cNvPr>
@@ -4075,7 +4031,7 @@
           <p:cNvPr id="52" name="Seller-level signals flow title">
             <a:extLst>
               <a:ext uri="{FF2B5EF4-FFF2-40B4-BE49-F238E27FC236}">
-                <ns2:creationId id="{B64306AD-2C64-4117-940F-62837FE5EF2C}"/>
+                <a16:creationId xmlns:a16="http://schemas.microsoft.com/office/drawing/2014/main" id="{B64306AD-2C64-4117-940F-62837FE5EF2C}"/>
               </a:ext>
             </a:extLst>
           </p:cNvPr>
@@ -4119,7 +4075,7 @@
           <p:cNvPr id="53" name="Seller-level signals flow sub">
             <a:extLst>
               <a:ext uri="{FF2B5EF4-FFF2-40B4-BE49-F238E27FC236}">
-                <ns2:creationId id="{8C30BFA1-5952-479F-B5E3-391E5874D34F}"/>
+                <a16:creationId xmlns:a16="http://schemas.microsoft.com/office/drawing/2014/main" id="{8C30BFA1-5952-479F-B5E3-391E5874D34F}"/>
               </a:ext>
             </a:extLst>
           </p:cNvPr>
@@ -4163,7 +4119,7 @@
           <p:cNvPr id="54" name="Scoring flow arrow">
             <a:extLst>
               <a:ext uri="{FF2B5EF4-FFF2-40B4-BE49-F238E27FC236}">
-                <ns2:creationId id="{197806AB-87A7-448B-9F2C-9E7C1B1153B5}"/>
+                <a16:creationId xmlns:a16="http://schemas.microsoft.com/office/drawing/2014/main" id="{197806AB-87A7-448B-9F2C-9E7C1B1153B5}"/>
               </a:ext>
             </a:extLst>
           </p:cNvPr>
@@ -4200,7 +4156,7 @@
           <p:cNvPr id="55" name="Weighted score flow node">
             <a:extLst>
               <a:ext uri="{FF2B5EF4-FFF2-40B4-BE49-F238E27FC236}">
-                <ns2:creationId id="{8521D761-1E4B-439E-BE41-C720C69E78B3}"/>
+                <a16:creationId xmlns:a16="http://schemas.microsoft.com/office/drawing/2014/main" id="{8521D761-1E4B-439E-BE41-C720C69E78B3}"/>
               </a:ext>
             </a:extLst>
           </p:cNvPr>
@@ -4239,7 +4195,7 @@
           <p:cNvPr id="56" name="Weighted score flow title">
             <a:extLst>
               <a:ext uri="{FF2B5EF4-FFF2-40B4-BE49-F238E27FC236}">
-                <ns2:creationId id="{4D8BBBFF-0C25-4B66-8FB2-3D1F31EFAEF6}"/>
+                <a16:creationId xmlns:a16="http://schemas.microsoft.com/office/drawing/2014/main" id="{4D8BBBFF-0C25-4B66-8FB2-3D1F31EFAEF6}"/>
               </a:ext>
             </a:extLst>
           </p:cNvPr>
@@ -4283,7 +4239,7 @@
           <p:cNvPr id="57" name="Weighted score flow sub">
             <a:extLst>
               <a:ext uri="{FF2B5EF4-FFF2-40B4-BE49-F238E27FC236}">
-                <ns2:creationId id="{14CA54AA-B2C8-4629-8C0F-B16CD5CA3561}"/>
+                <a16:creationId xmlns:a16="http://schemas.microsoft.com/office/drawing/2014/main" id="{14CA54AA-B2C8-4629-8C0F-B16CD5CA3561}"/>
               </a:ext>
             </a:extLst>
           </p:cNvPr>
@@ -4327,7 +4283,7 @@
           <p:cNvPr id="58" name="Scoring flow arrow">
             <a:extLst>
               <a:ext uri="{FF2B5EF4-FFF2-40B4-BE49-F238E27FC236}">
-                <ns2:creationId id="{DBB14361-6641-466D-BC24-AD870E154D01}"/>
+                <a16:creationId xmlns:a16="http://schemas.microsoft.com/office/drawing/2014/main" id="{DBB14361-6641-466D-BC24-AD870E154D01}"/>
               </a:ext>
             </a:extLst>
           </p:cNvPr>
@@ -4364,7 +4320,7 @@
           <p:cNvPr id="59" name="Ranked SMB list flow node">
             <a:extLst>
               <a:ext uri="{FF2B5EF4-FFF2-40B4-BE49-F238E27FC236}">
-                <ns2:creationId id="{0CAD2441-D62F-43BD-8563-74BEBDAA21D3}"/>
+                <a16:creationId xmlns:a16="http://schemas.microsoft.com/office/drawing/2014/main" id="{0CAD2441-D62F-43BD-8563-74BEBDAA21D3}"/>
               </a:ext>
             </a:extLst>
           </p:cNvPr>
@@ -4403,7 +4359,7 @@
           <p:cNvPr id="60" name="Ranked SMB list flow title">
             <a:extLst>
               <a:ext uri="{FF2B5EF4-FFF2-40B4-BE49-F238E27FC236}">
-                <ns2:creationId id="{5474439C-A5FC-456C-A261-876B2BD3B570}"/>
+                <a16:creationId xmlns:a16="http://schemas.microsoft.com/office/drawing/2014/main" id="{5474439C-A5FC-456C-A261-876B2BD3B570}"/>
               </a:ext>
             </a:extLst>
           </p:cNvPr>
@@ -4447,7 +4403,7 @@
           <p:cNvPr id="61" name="Ranked SMB list flow sub">
             <a:extLst>
               <a:ext uri="{FF2B5EF4-FFF2-40B4-BE49-F238E27FC236}">
-                <ns2:creationId id="{CE7F21BB-EACA-4F03-8B7C-53AC29E6E3F3}"/>
+                <a16:creationId xmlns:a16="http://schemas.microsoft.com/office/drawing/2014/main" id="{CE7F21BB-EACA-4F03-8B7C-53AC29E6E3F3}"/>
               </a:ext>
             </a:extLst>
           </p:cNvPr>
@@ -4489,7 +4445,7 @@
     </p:spTree>
     <p:extLst>
       <p:ext uri="{BB962C8B-B14F-4D97-AF65-F5344CB8AC3E}">
-        <ns3:creationId val="1565786713"/>
+        <p14:creationId xmlns:p14="http://schemas.microsoft.com/office/powerpoint/2010/main" val="1565786713"/>
       </p:ext>
     </p:extLst>
   </p:cSld>
@@ -8670,45 +8626,45 @@
 </file>
 
 <file path=ppt/slides/slide6.xml><?xml version="1.0" encoding="utf-8"?>
-<ns0:sld xmlns:a="http://schemas.openxmlformats.org/drawingml/2006/main" xmlns:ns0="http://schemas.openxmlformats.org/presentationml/2006/main" xmlns:ns2="http://schemas.microsoft.com/office/drawing/2014/main" xmlns:ns3="http://schemas.microsoft.com/office/powerpoint/2010/main">
-  <ns0:cSld>
-    <ns0:bg>
-      <ns0:bgPr>
+<p:sld xmlns:a="http://schemas.openxmlformats.org/drawingml/2006/main" xmlns:r="http://schemas.openxmlformats.org/officeDocument/2006/relationships" xmlns:p="http://schemas.openxmlformats.org/presentationml/2006/main">
+  <p:cSld>
+    <p:bg>
+      <p:bgPr>
         <a:solidFill>
           <a:srgbClr val="050505"/>
         </a:solidFill>
         <a:effectLst/>
-      </ns0:bgPr>
-    </ns0:bg>
-    <ns0:spTree>
-      <ns0:nvGrpSpPr>
-        <ns0:cNvPr id="1" name=""/>
-        <ns0:cNvGrpSpPr/>
-        <ns0:nvPr/>
-      </ns0:nvGrpSpPr>
-      <ns0:grpSpPr>
+      </p:bgPr>
+    </p:bg>
+    <p:spTree>
+      <p:nvGrpSpPr>
+        <p:cNvPr id="1" name=""/>
+        <p:cNvGrpSpPr/>
+        <p:nvPr/>
+      </p:nvGrpSpPr>
+      <p:grpSpPr>
         <a:xfrm>
           <a:off x="0" y="0"/>
           <a:ext cx="0" cy="0"/>
           <a:chOff x="0" y="0"/>
           <a:chExt cx="0" cy="0"/>
         </a:xfrm>
-      </ns0:grpSpPr>
-      <ns0:sp>
-        <ns0:nvSpPr>
-          <ns0:cNvPr id="2" name="Text">
-            <a:extLst>
-              <a:ext uri="{FF2B5EF4-FFF2-40B4-BE49-F238E27FC236}">
-                <ns2:creationId id="{9B99C13B-D96C-4CE3-A99D-EEC47E04FC52}"/>
-              </a:ext>
-            </a:extLst>
-          </ns0:cNvPr>
-          <ns0:cNvSpPr>
-            <a:spLocks noGrp="1"/>
-          </ns0:cNvSpPr>
-          <ns0:nvPr/>
-        </ns0:nvSpPr>
-        <ns0:spPr>
+      </p:grpSpPr>
+      <p:sp>
+        <p:nvSpPr>
+          <p:cNvPr id="2" name="Text">
+            <a:extLst>
+              <a:ext uri="{FF2B5EF4-FFF2-40B4-BE49-F238E27FC236}">
+                <a16:creationId xmlns:a16="http://schemas.microsoft.com/office/drawing/2014/main" id="{9B99C13B-D96C-4CE3-A99D-EEC47E04FC52}"/>
+              </a:ext>
+            </a:extLst>
+          </p:cNvPr>
+          <p:cNvSpPr>
+            <a:spLocks noGrp="1"/>
+          </p:cNvSpPr>
+          <p:nvPr/>
+        </p:nvSpPr>
+        <p:spPr>
           <a:xfrm>
             <a:off x="361950" y="323850"/>
             <a:ext cx="819150" cy="628650"/>
@@ -8723,8 +8679,8 @@
               </a:srgbClr>
             </a:solidFill>
           </a:ln>
-        </ns0:spPr>
-        <ns0:txBody>
+        </p:spPr>
+        <p:txBody>
           <a:bodyPr lIns="57150" tIns="38100" rIns="57150" bIns="38100" anchor="t"/>
           <a:lstStyle/>
           <a:p>
@@ -8751,23 +8707,23 @@
               <a:t>01</a:t>
             </a:r>
           </a:p>
-        </ns0:txBody>
-      </ns0:sp>
-      <ns0:sp>
-        <ns0:nvSpPr>
-          <ns0:cNvPr id="3" name="Text">
-            <a:extLst>
-              <a:ext uri="{FF2B5EF4-FFF2-40B4-BE49-F238E27FC236}">
-                <ns2:creationId id="{F418B9B4-1E2F-4CC1-B49D-5F6E73EACFA5}"/>
-              </a:ext>
-            </a:extLst>
-          </ns0:cNvPr>
-          <ns0:cNvSpPr>
-            <a:spLocks noGrp="1"/>
-          </ns0:cNvSpPr>
-          <ns0:nvPr/>
-        </ns0:nvSpPr>
-        <ns0:spPr>
+        </p:txBody>
+      </p:sp>
+      <p:sp>
+        <p:nvSpPr>
+          <p:cNvPr id="3" name="Text">
+            <a:extLst>
+              <a:ext uri="{FF2B5EF4-FFF2-40B4-BE49-F238E27FC236}">
+                <a16:creationId xmlns:a16="http://schemas.microsoft.com/office/drawing/2014/main" id="{F418B9B4-1E2F-4CC1-B49D-5F6E73EACFA5}"/>
+              </a:ext>
+            </a:extLst>
+          </p:cNvPr>
+          <p:cNvSpPr>
+            <a:spLocks noGrp="1"/>
+          </p:cNvSpPr>
+          <p:nvPr/>
+        </p:nvSpPr>
+        <p:spPr>
           <a:xfrm>
             <a:off x="1257300" y="323850"/>
             <a:ext cx="9953625" cy="714375"/>
@@ -8782,8 +8738,8 @@
               </a:srgbClr>
             </a:solidFill>
           </a:ln>
-        </ns0:spPr>
-        <ns0:txBody>
+        </p:spPr>
+        <p:txBody>
           <a:bodyPr lIns="57150" tIns="38100" rIns="57150" bIns="38100" anchor="t"/>
           <a:lstStyle/>
           <a:p>
@@ -8810,23 +8766,23 @@
               <a:t>1.4 Category Specialization</a:t>
             </a:r>
           </a:p>
-        </ns0:txBody>
-      </ns0:sp>
-      <ns0:sp>
-        <ns0:nvSpPr>
-          <ns0:cNvPr id="5" name="Divider">
-            <a:extLst>
-              <a:ext uri="{FF2B5EF4-FFF2-40B4-BE49-F238E27FC236}">
-                <ns2:creationId id="{389B6C05-0CB8-47D9-807C-9FB880C49BFF}"/>
-              </a:ext>
-            </a:extLst>
-          </ns0:cNvPr>
-          <ns0:cNvSpPr>
-            <a:spLocks noGrp="1"/>
-          </ns0:cNvSpPr>
-          <ns0:nvPr/>
-        </ns0:nvSpPr>
-        <ns0:spPr>
+        </p:txBody>
+      </p:sp>
+      <p:sp>
+        <p:nvSpPr>
+          <p:cNvPr id="5" name="Divider">
+            <a:extLst>
+              <a:ext uri="{FF2B5EF4-FFF2-40B4-BE49-F238E27FC236}">
+                <a16:creationId xmlns:a16="http://schemas.microsoft.com/office/drawing/2014/main" id="{389B6C05-0CB8-47D9-807C-9FB880C49BFF}"/>
+              </a:ext>
+            </a:extLst>
+          </p:cNvPr>
+          <p:cNvSpPr>
+            <a:spLocks noGrp="1"/>
+          </p:cNvSpPr>
+          <p:nvPr/>
+        </p:nvSpPr>
+        <p:spPr>
           <a:xfrm>
             <a:off x="457200" y="1160000"/>
             <a:ext cx="11277600" cy="0"/>
@@ -8839,30 +8795,30 @@
               <a:srgbClr val="3A3A3A"/>
             </a:solidFill>
           </a:ln>
-        </ns0:spPr>
-        <ns0:txBody>
+        </p:spPr>
+        <p:txBody>
           <a:bodyPr/>
           <a:lstStyle/>
           <a:p>
             <a:endParaRPr/>
           </a:p>
-        </ns0:txBody>
-      </ns0:sp>
-      <ns0:sp>
-        <ns0:nvSpPr>
-          <ns0:cNvPr id="13" name="Divider">
-            <a:extLst>
-              <a:ext uri="{FF2B5EF4-FFF2-40B4-BE49-F238E27FC236}">
-                <ns2:creationId id="{DAE51419-1FE7-4CE0-922B-B1D781F0F39A}"/>
-              </a:ext>
-            </a:extLst>
-          </ns0:cNvPr>
-          <ns0:cNvSpPr>
-            <a:spLocks noGrp="1"/>
-          </ns0:cNvSpPr>
-          <ns0:nvPr/>
-        </ns0:nvSpPr>
-        <ns0:spPr>
+        </p:txBody>
+      </p:sp>
+      <p:sp>
+        <p:nvSpPr>
+          <p:cNvPr id="13" name="Divider">
+            <a:extLst>
+              <a:ext uri="{FF2B5EF4-FFF2-40B4-BE49-F238E27FC236}">
+                <a16:creationId xmlns:a16="http://schemas.microsoft.com/office/drawing/2014/main" id="{DAE51419-1FE7-4CE0-922B-B1D781F0F39A}"/>
+              </a:ext>
+            </a:extLst>
+          </p:cNvPr>
+          <p:cNvSpPr>
+            <a:spLocks noGrp="1"/>
+          </p:cNvSpPr>
+          <p:nvPr/>
+        </p:nvSpPr>
+        <p:spPr>
           <a:xfrm>
             <a:off x="457200" y="6210300"/>
             <a:ext cx="11277600" cy="0"/>
@@ -8875,30 +8831,30 @@
               <a:srgbClr val="3A3A3A"/>
             </a:solidFill>
           </a:ln>
-        </ns0:spPr>
-        <ns0:txBody>
+        </p:spPr>
+        <p:txBody>
           <a:bodyPr/>
           <a:lstStyle/>
           <a:p>
             <a:endParaRPr/>
           </a:p>
-        </ns0:txBody>
-      </ns0:sp>
-      <ns0:sp>
-        <ns0:nvSpPr>
-          <ns0:cNvPr id="14" name="Text">
-            <a:extLst>
-              <a:ext uri="{FF2B5EF4-FFF2-40B4-BE49-F238E27FC236}">
-                <ns2:creationId id="{156E590D-3E7B-43ED-86D8-86950CA69CF0}"/>
-              </a:ext>
-            </a:extLst>
-          </ns0:cNvPr>
-          <ns0:cNvSpPr>
-            <a:spLocks noGrp="1"/>
-          </ns0:cNvSpPr>
-          <ns0:nvPr/>
-        </ns0:nvSpPr>
-        <ns0:spPr>
+        </p:txBody>
+      </p:sp>
+      <p:sp>
+        <p:nvSpPr>
+          <p:cNvPr id="14" name="Text">
+            <a:extLst>
+              <a:ext uri="{FF2B5EF4-FFF2-40B4-BE49-F238E27FC236}">
+                <a16:creationId xmlns:a16="http://schemas.microsoft.com/office/drawing/2014/main" id="{156E590D-3E7B-43ED-86D8-86950CA69CF0}"/>
+              </a:ext>
+            </a:extLst>
+          </p:cNvPr>
+          <p:cNvSpPr>
+            <a:spLocks noGrp="1"/>
+          </p:cNvSpPr>
+          <p:nvPr/>
+        </p:nvSpPr>
+        <p:spPr>
           <a:xfrm>
             <a:off x="457200" y="6286500"/>
             <a:ext cx="7239000" cy="228600"/>
@@ -8913,8 +8869,8 @@
               </a:srgbClr>
             </a:solidFill>
           </a:ln>
-        </ns0:spPr>
-        <ns0:txBody>
+        </p:spPr>
+        <p:txBody>
           <a:bodyPr lIns="57150" tIns="38100" rIns="57150" bIns="38100" anchor="t"/>
           <a:lstStyle/>
           <a:p>
@@ -8941,23 +8897,23 @@
               <a:t>SMB Identification</a:t>
             </a:r>
           </a:p>
-        </ns0:txBody>
-      </ns0:sp>
-      <ns0:sp>
-        <ns0:nvSpPr>
-          <ns0:cNvPr id="15" name="Text">
-            <a:extLst>
-              <a:ext uri="{FF2B5EF4-FFF2-40B4-BE49-F238E27FC236}">
-                <ns2:creationId id="{D948341B-6D56-43D2-9783-B62A329B3143}"/>
-              </a:ext>
-            </a:extLst>
-          </ns0:cNvPr>
-          <ns0:cNvSpPr>
-            <a:spLocks noGrp="1"/>
-          </ns0:cNvSpPr>
-          <ns0:nvPr/>
-        </ns0:nvSpPr>
-        <ns0:spPr>
+        </p:txBody>
+      </p:sp>
+      <p:sp>
+        <p:nvSpPr>
+          <p:cNvPr id="15" name="Text">
+            <a:extLst>
+              <a:ext uri="{FF2B5EF4-FFF2-40B4-BE49-F238E27FC236}">
+                <a16:creationId xmlns:a16="http://schemas.microsoft.com/office/drawing/2014/main" id="{D948341B-6D56-43D2-9783-B62A329B3143}"/>
+              </a:ext>
+            </a:extLst>
+          </p:cNvPr>
+          <p:cNvSpPr>
+            <a:spLocks noGrp="1"/>
+          </p:cNvSpPr>
+          <p:nvPr/>
+        </p:nvSpPr>
+        <p:spPr>
           <a:xfrm>
             <a:off x="11144250" y="6286500"/>
             <a:ext cx="590550" cy="228600"/>
@@ -8972,8 +8928,8 @@
               </a:srgbClr>
             </a:solidFill>
           </a:ln>
-        </ns0:spPr>
-        <ns0:txBody>
+        </p:spPr>
+        <p:txBody>
           <a:bodyPr lIns="57150" tIns="38100" rIns="57150" bIns="38100" anchor="t"/>
           <a:lstStyle/>
           <a:p>
@@ -9000,23 +8956,23 @@
               <a:t>06 / 08</a:t>
             </a:r>
           </a:p>
-        </ns0:txBody>
-      </ns0:sp>
-      <ns0:sp>
-        <ns0:nvSpPr>
-          <ns0:cNvPr id="16" name="Combined signal">
-            <a:extLst>
-              <a:ext uri="{FF2B5EF4-FFF2-40B4-BE49-F238E27FC236}">
-                <ns2:creationId id="{D83D076D-E780-418E-AF42-7556841364D6}"/>
-              </a:ext>
-            </a:extLst>
-          </ns0:cNvPr>
-          <ns0:cNvSpPr>
-            <a:spLocks noGrp="1"/>
-          </ns0:cNvSpPr>
-          <ns0:nvPr/>
-        </ns0:nvSpPr>
-        <ns0:spPr>
+        </p:txBody>
+      </p:sp>
+      <p:sp>
+        <p:nvSpPr>
+          <p:cNvPr id="16" name="Combined signal">
+            <a:extLst>
+              <a:ext uri="{FF2B5EF4-FFF2-40B4-BE49-F238E27FC236}">
+                <a16:creationId xmlns:a16="http://schemas.microsoft.com/office/drawing/2014/main" id="{D83D076D-E780-418E-AF42-7556841364D6}"/>
+              </a:ext>
+            </a:extLst>
+          </p:cNvPr>
+          <p:cNvSpPr>
+            <a:spLocks noGrp="1"/>
+          </p:cNvSpPr>
+          <p:nvPr/>
+        </p:nvSpPr>
+        <p:spPr>
           <a:xfrm>
             <a:off x="609600" y="1428750"/>
             <a:ext cx="8572500" cy="228600"/>
@@ -9028,8 +8984,8 @@
           <a:ln w="0">
             <a:noFill/>
           </a:ln>
-        </ns0:spPr>
-        <ns0:txBody>
+        </p:spPr>
+        <p:txBody>
           <a:bodyPr wrap="square" lIns="0" tIns="0" rIns="0" bIns="0" anchor="t"/>
           <a:lstStyle/>
           <a:p>
@@ -9048,23 +9004,23 @@
               <a:t>Signal: SMBs often show repeated supply within the same category or subcategory.</a:t>
             </a:r>
           </a:p>
-        </ns0:txBody>
-      </ns0:sp>
-      <ns0:sp>
-        <ns0:nvSpPr>
-          <ns0:cNvPr id="17" name="Potential Metrics">
-            <a:extLst>
-              <a:ext uri="{FF2B5EF4-FFF2-40B4-BE49-F238E27FC236}">
-                <ns2:creationId id="{803860D4-8BEE-4C49-A0F7-6B5EC0893A07}"/>
-              </a:ext>
-            </a:extLst>
-          </ns0:cNvPr>
-          <ns0:cNvSpPr>
-            <a:spLocks noGrp="1"/>
-          </ns0:cNvSpPr>
-          <ns0:nvPr/>
-        </ns0:nvSpPr>
-        <ns0:spPr>
+        </p:txBody>
+      </p:sp>
+      <p:sp>
+        <p:nvSpPr>
+          <p:cNvPr id="17" name="Potential Metrics">
+            <a:extLst>
+              <a:ext uri="{FF2B5EF4-FFF2-40B4-BE49-F238E27FC236}">
+                <a16:creationId xmlns:a16="http://schemas.microsoft.com/office/drawing/2014/main" id="{803860D4-8BEE-4C49-A0F7-6B5EC0893A07}"/>
+              </a:ext>
+            </a:extLst>
+          </p:cNvPr>
+          <p:cNvSpPr>
+            <a:spLocks noGrp="1"/>
+          </p:cNvSpPr>
+          <p:nvPr/>
+        </p:nvSpPr>
+        <p:spPr>
           <a:xfrm>
             <a:off x="609600" y="1809750"/>
             <a:ext cx="2381250" cy="228600"/>
@@ -9076,8 +9032,8 @@
           <a:ln w="0">
             <a:noFill/>
           </a:ln>
-        </ns0:spPr>
-        <ns0:txBody>
+        </p:spPr>
+        <p:txBody>
           <a:bodyPr wrap="square" lIns="0" tIns="0" rIns="0" bIns="0" anchor="t"/>
           <a:lstStyle/>
           <a:p>
@@ -9096,23 +9052,23 @@
               <a:t>Potential Metrics</a:t>
             </a:r>
           </a:p>
-        </ns0:txBody>
-      </ns0:sp>
-      <ns0:sp>
-        <ns0:nvSpPr>
-          <ns0:cNvPr id="18" name="Scoring window">
-            <a:extLst>
-              <a:ext uri="{FF2B5EF4-FFF2-40B4-BE49-F238E27FC236}">
-                <ns2:creationId id="{71E17E3F-18A3-4169-9218-018DB913F7F4}"/>
-              </a:ext>
-            </a:extLst>
-          </ns0:cNvPr>
-          <ns0:cNvSpPr>
-            <a:spLocks noGrp="1"/>
-          </ns0:cNvSpPr>
-          <ns0:nvPr/>
-        </ns0:nvSpPr>
-        <ns0:spPr>
+        </p:txBody>
+      </p:sp>
+      <p:sp>
+        <p:nvSpPr>
+          <p:cNvPr id="18" name="Scoring window">
+            <a:extLst>
+              <a:ext uri="{FF2B5EF4-FFF2-40B4-BE49-F238E27FC236}">
+                <a16:creationId xmlns:a16="http://schemas.microsoft.com/office/drawing/2014/main" id="{71E17E3F-18A3-4169-9218-018DB913F7F4}"/>
+              </a:ext>
+            </a:extLst>
+          </p:cNvPr>
+          <p:cNvSpPr>
+            <a:spLocks noGrp="1"/>
+          </p:cNvSpPr>
+          <p:nvPr/>
+        </p:nvSpPr>
+        <p:spPr>
           <a:xfrm>
             <a:off x="609600" y="2038350"/>
             <a:ext cx="6858000" cy="171450"/>
@@ -9124,8 +9080,8 @@
           <a:ln w="0">
             <a:noFill/>
           </a:ln>
-        </ns0:spPr>
-        <ns0:txBody>
+        </p:spPr>
+        <p:txBody>
           <a:bodyPr wrap="square" lIns="0" tIns="0" rIns="0" bIns="0" anchor="t"/>
           <a:lstStyle/>
           <a:p>
@@ -9144,24 +9100,24 @@
               <a:t>Scoring window: last 12 months; use main category and specific subcategory.</a:t>
             </a:r>
           </a:p>
-        </ns0:txBody>
-      </ns0:sp>
-      <ns0:graphicFrame>
-        <ns0:nvGraphicFramePr>
-          <ns0:cNvPr id="19" name="Potential Metrics table"/>
-          <ns0:cNvGraphicFramePr/>
-          <ns0:nvPr>
-            <ns0:extLst>
-              <ns0:ext uri="{D42A27DB-BD31-4B8C-83A1-F6EECF244321}">
-                <ns3:modId val="2713399914"/>
-              </ns0:ext>
-            </ns0:extLst>
-          </ns0:nvPr>
-        </ns0:nvGraphicFramePr>
-        <ns0:xfrm>
+        </p:txBody>
+      </p:sp>
+      <p:graphicFrame>
+        <p:nvGraphicFramePr>
+          <p:cNvPr id="19" name="Potential Metrics table"/>
+          <p:cNvGraphicFramePr/>
+          <p:nvPr>
+            <p:extLst>
+              <p:ext uri="{D42A27DB-BD31-4B8C-83A1-F6EECF244321}">
+                <p14:modId xmlns:p14="http://schemas.microsoft.com/office/powerpoint/2010/main" val="2713399914"/>
+              </p:ext>
+            </p:extLst>
+          </p:nvPr>
+        </p:nvGraphicFramePr>
+        <p:xfrm>
           <a:off x="609600" y="2399549"/>
           <a:ext cx="10972800" cy="762000"/>
-        </ns0:xfrm>
+        </p:xfrm>
         <a:graphic>
           <a:graphicData uri="http://schemas.openxmlformats.org/drawingml/2006/table">
             <a:tbl>
@@ -9172,21 +9128,21 @@
                 <a:gridCol w="2952750">
                   <a:extLst>
                     <a:ext uri="{9D8B030D-6E8A-4147-A177-3AD203B41FA5}">
-                      <ns2:colId val="20000"/>
+                      <a16:colId xmlns:a16="http://schemas.microsoft.com/office/drawing/2014/main" val="20000"/>
                     </a:ext>
                   </a:extLst>
                 </a:gridCol>
                 <a:gridCol w="3238500">
                   <a:extLst>
                     <a:ext uri="{9D8B030D-6E8A-4147-A177-3AD203B41FA5}">
-                      <ns2:colId val="20001"/>
+                      <a16:colId xmlns:a16="http://schemas.microsoft.com/office/drawing/2014/main" val="20001"/>
                     </a:ext>
                   </a:extLst>
                 </a:gridCol>
                 <a:gridCol w="4781550">
                   <a:extLst>
                     <a:ext uri="{9D8B030D-6E8A-4147-A177-3AD203B41FA5}">
-                      <ns2:colId val="20002"/>
+                      <a16:colId xmlns:a16="http://schemas.microsoft.com/office/drawing/2014/main" val="20002"/>
                     </a:ext>
                   </a:extLst>
                 </a:gridCol>
@@ -9335,7 +9291,7 @@
                 </a:tc>
                 <a:extLst>
                   <a:ext uri="{0D108BD9-81ED-4DB2-BD59-A6C34878D82A}">
-                    <ns2:rowId val="10000"/>
+                    <a16:rowId xmlns:a16="http://schemas.microsoft.com/office/drawing/2014/main" val="10000"/>
                   </a:ext>
                 </a:extLst>
               </a:tr>
@@ -9483,29 +9439,29 @@
                 </a:tc>
                 <a:extLst>
                   <a:ext uri="{0D108BD9-81ED-4DB2-BD59-A6C34878D82A}">
-                    <ns2:rowId val="10001"/>
+                    <a16:rowId xmlns:a16="http://schemas.microsoft.com/office/drawing/2014/main" val="10001"/>
                   </a:ext>
                 </a:extLst>
               </a:tr>
             </a:tbl>
           </a:graphicData>
         </a:graphic>
-      </ns0:graphicFrame>
-      <ns0:sp>
-        <ns0:nvSpPr>
-          <ns0:cNvPr id="34" name="Business-prone examples label">
-            <a:extLst>
-              <a:ext uri="{FF2B5EF4-FFF2-40B4-BE49-F238E27FC236}">
-                <ns2:creationId id="{659BC4DA-48DD-4F7A-AAA1-C8016FE1E228}"/>
-              </a:ext>
-            </a:extLst>
-          </ns0:cNvPr>
-          <ns0:cNvSpPr>
-            <a:spLocks noGrp="1"/>
-          </ns0:cNvSpPr>
-          <ns0:nvPr/>
-        </ns0:nvSpPr>
-        <ns0:spPr>
+      </p:graphicFrame>
+      <p:sp>
+        <p:nvSpPr>
+          <p:cNvPr id="34" name="Business-prone examples label">
+            <a:extLst>
+              <a:ext uri="{FF2B5EF4-FFF2-40B4-BE49-F238E27FC236}">
+                <a16:creationId xmlns:a16="http://schemas.microsoft.com/office/drawing/2014/main" id="{659BC4DA-48DD-4F7A-AAA1-C8016FE1E228}"/>
+              </a:ext>
+            </a:extLst>
+          </p:cNvPr>
+          <p:cNvSpPr>
+            <a:spLocks noGrp="1"/>
+          </p:cNvSpPr>
+          <p:nvPr/>
+        </p:nvSpPr>
+        <p:spPr>
           <a:xfrm>
             <a:off x="609600" y="3756958"/>
             <a:ext cx="4000500" cy="228600"/>
@@ -9517,8 +9473,8 @@
           <a:ln w="0">
             <a:noFill/>
           </a:ln>
-        </ns0:spPr>
-        <ns0:txBody>
+        </p:spPr>
+        <p:txBody>
           <a:bodyPr wrap="square" lIns="0" tIns="0" rIns="0" bIns="0" anchor="t"/>
           <a:lstStyle/>
           <a:p>
@@ -9537,23 +9493,23 @@
               <a:t>Threshold Examples</a:t>
             </a:r>
           </a:p>
-        </ns0:txBody>
-      </ns0:sp>
-      <ns0:sp>
-        <ns0:nvSpPr>
-          <ns0:cNvPr id="35" name="Example item divider">
-            <a:extLst>
-              <a:ext uri="{FF2B5EF4-FFF2-40B4-BE49-F238E27FC236}">
-                <ns2:creationId id="{0746B772-4448-42AF-815E-C2D7BD502F99}"/>
-              </a:ext>
-            </a:extLst>
-          </ns0:cNvPr>
-          <ns0:cNvSpPr>
-            <a:spLocks noGrp="1"/>
-          </ns0:cNvSpPr>
-          <ns0:nvPr/>
-        </ns0:nvSpPr>
-        <ns0:spPr>
+        </p:txBody>
+      </p:sp>
+      <p:sp>
+        <p:nvSpPr>
+          <p:cNvPr id="35" name="Example item divider">
+            <a:extLst>
+              <a:ext uri="{FF2B5EF4-FFF2-40B4-BE49-F238E27FC236}">
+                <a16:creationId xmlns:a16="http://schemas.microsoft.com/office/drawing/2014/main" id="{0746B772-4448-42AF-815E-C2D7BD502F99}"/>
+              </a:ext>
+            </a:extLst>
+          </p:cNvPr>
+          <p:cNvSpPr>
+            <a:spLocks noGrp="1"/>
+          </p:cNvSpPr>
+          <p:nvPr/>
+        </p:nvSpPr>
+        <p:spPr>
           <a:xfrm>
             <a:off x="609600" y="3995083"/>
             <a:ext cx="5295900" cy="9525"/>
@@ -9566,31 +9522,31 @@
               <a:srgbClr val="1C1C1C"/>
             </a:solidFill>
           </a:ln>
-        </ns0:spPr>
-        <ns0:txBody>
+        </p:spPr>
+        <p:txBody>
           <a:bodyPr/>
           <a:lstStyle/>
           <a:p>
             <a:pPr marL="0" indent="0" algn="l" defTabSz="914400" rtl="0"/>
             <a:endParaRPr/>
           </a:p>
-        </ns0:txBody>
-      </ns0:sp>
-      <ns0:sp>
-        <ns0:nvSpPr>
-          <ns0:cNvPr id="36" name="Example categories">
-            <a:extLst>
-              <a:ext uri="{FF2B5EF4-FFF2-40B4-BE49-F238E27FC236}">
-                <ns2:creationId id="{9B73CDFC-1992-4118-968A-20482CD149D3}"/>
-              </a:ext>
-            </a:extLst>
-          </ns0:cNvPr>
-          <ns0:cNvSpPr>
-            <a:spLocks noGrp="1"/>
-          </ns0:cNvSpPr>
-          <ns0:nvPr/>
-        </ns0:nvSpPr>
-        <ns0:spPr>
+        </p:txBody>
+      </p:sp>
+      <p:sp>
+        <p:nvSpPr>
+          <p:cNvPr id="36" name="Example categories">
+            <a:extLst>
+              <a:ext uri="{FF2B5EF4-FFF2-40B4-BE49-F238E27FC236}">
+                <a16:creationId xmlns:a16="http://schemas.microsoft.com/office/drawing/2014/main" id="{9B73CDFC-1992-4118-968A-20482CD149D3}"/>
+              </a:ext>
+            </a:extLst>
+          </p:cNvPr>
+          <p:cNvSpPr>
+            <a:spLocks noGrp="1"/>
+          </p:cNvSpPr>
+          <p:nvPr/>
+        </p:nvSpPr>
+        <p:spPr>
           <a:xfrm>
             <a:off x="609600" y="4080808"/>
             <a:ext cx="5295900" cy="400050"/>
@@ -9602,8 +9558,8 @@
           <a:ln w="0">
             <a:noFill/>
           </a:ln>
-        </ns0:spPr>
-        <ns0:txBody>
+        </p:spPr>
+        <p:txBody>
           <a:bodyPr wrap="square" lIns="0" tIns="0" rIns="0" bIns="0" anchor="t"/>
           <a:lstStyle/>
           <a:p>
@@ -9633,23 +9589,23 @@
               <a:t>: Cars; Motorcycles; Caravans and Camping; Water Sports and Boats; Car Parts</a:t>
             </a:r>
           </a:p>
-        </ns0:txBody>
-      </ns0:sp>
-      <ns0:sp>
-        <ns0:nvSpPr>
-          <ns0:cNvPr id="37" name="Example why">
-            <a:extLst>
-              <a:ext uri="{FF2B5EF4-FFF2-40B4-BE49-F238E27FC236}">
-                <ns2:creationId id="{1E0A8FA6-A458-42C1-80BA-A4B07BDF1EF7}"/>
-              </a:ext>
-            </a:extLst>
-          </ns0:cNvPr>
-          <ns0:cNvSpPr>
-            <a:spLocks noGrp="1"/>
-          </ns0:cNvSpPr>
-          <ns0:nvPr/>
-        </ns0:nvSpPr>
-        <ns0:spPr>
+        </p:txBody>
+      </p:sp>
+      <p:sp>
+        <p:nvSpPr>
+          <p:cNvPr id="37" name="Example why">
+            <a:extLst>
+              <a:ext uri="{FF2B5EF4-FFF2-40B4-BE49-F238E27FC236}">
+                <a16:creationId xmlns:a16="http://schemas.microsoft.com/office/drawing/2014/main" id="{1E0A8FA6-A458-42C1-80BA-A4B07BDF1EF7}"/>
+              </a:ext>
+            </a:extLst>
+          </p:cNvPr>
+          <p:cNvSpPr>
+            <a:spLocks noGrp="1"/>
+          </p:cNvSpPr>
+          <p:nvPr/>
+        </p:nvSpPr>
+        <p:spPr>
           <a:xfrm>
             <a:off x="609600" y="4499908"/>
             <a:ext cx="5295900" cy="400050"/>
@@ -9661,8 +9617,8 @@
           <a:ln w="0">
             <a:noFill/>
           </a:ln>
-        </ns0:spPr>
-        <ns0:txBody>
+        </p:spPr>
+        <p:txBody>
           <a:bodyPr wrap="square" lIns="0" tIns="0" rIns="0" bIns="0" anchor="t"/>
           <a:lstStyle/>
           <a:p>
@@ -9681,23 +9637,23 @@
               <a:t>Lower threshold: a few listings can already suggest commercial supply.</a:t>
             </a:r>
           </a:p>
-        </ns0:txBody>
-      </ns0:sp>
-      <ns0:sp>
-        <ns0:nvSpPr>
-          <ns0:cNvPr id="38" name="Example item divider">
-            <a:extLst>
-              <a:ext uri="{FF2B5EF4-FFF2-40B4-BE49-F238E27FC236}">
-                <ns2:creationId id="{2246B849-9CAA-4CDA-9731-69F8CD0A2366}"/>
-              </a:ext>
-            </a:extLst>
-          </ns0:cNvPr>
-          <ns0:cNvSpPr>
-            <a:spLocks noGrp="1"/>
-          </ns0:cNvSpPr>
-          <ns0:nvPr/>
-        </ns0:nvSpPr>
-        <ns0:spPr>
+        </p:txBody>
+      </p:sp>
+      <p:sp>
+        <p:nvSpPr>
+          <p:cNvPr id="38" name="Example item divider">
+            <a:extLst>
+              <a:ext uri="{FF2B5EF4-FFF2-40B4-BE49-F238E27FC236}">
+                <a16:creationId xmlns:a16="http://schemas.microsoft.com/office/drawing/2014/main" id="{2246B849-9CAA-4CDA-9731-69F8CD0A2366}"/>
+              </a:ext>
+            </a:extLst>
+          </p:cNvPr>
+          <p:cNvSpPr>
+            <a:spLocks noGrp="1"/>
+          </p:cNvSpPr>
+          <p:nvPr/>
+        </p:nvSpPr>
+        <p:spPr>
           <a:xfrm>
             <a:off x="6504300" y="3995083"/>
             <a:ext cx="5295900" cy="9525"/>
@@ -9710,30 +9666,30 @@
               <a:srgbClr val="1C1C1C"/>
             </a:solidFill>
           </a:ln>
-        </ns0:spPr>
-        <ns0:txBody>
+        </p:spPr>
+        <p:txBody>
           <a:bodyPr/>
           <a:lstStyle/>
           <a:p>
             <a:endParaRPr/>
           </a:p>
-        </ns0:txBody>
-      </ns0:sp>
-      <ns0:sp>
-        <ns0:nvSpPr>
-          <ns0:cNvPr id="39" name="Example categories">
-            <a:extLst>
-              <a:ext uri="{FF2B5EF4-FFF2-40B4-BE49-F238E27FC236}">
-                <ns2:creationId id="{05E1252A-3BA3-47D5-A31B-89A38C20CC26}"/>
-              </a:ext>
-            </a:extLst>
-          </ns0:cNvPr>
-          <ns0:cNvSpPr>
-            <a:spLocks noGrp="1"/>
-          </ns0:cNvSpPr>
-          <ns0:nvPr/>
-        </ns0:nvSpPr>
-        <ns0:spPr>
+        </p:txBody>
+      </p:sp>
+      <p:sp>
+        <p:nvSpPr>
+          <p:cNvPr id="39" name="Example categories">
+            <a:extLst>
+              <a:ext uri="{FF2B5EF4-FFF2-40B4-BE49-F238E27FC236}">
+                <a16:creationId xmlns:a16="http://schemas.microsoft.com/office/drawing/2014/main" id="{05E1252A-3BA3-47D5-A31B-89A38C20CC26}"/>
+              </a:ext>
+            </a:extLst>
+          </p:cNvPr>
+          <p:cNvSpPr>
+            <a:spLocks noGrp="1"/>
+          </p:cNvSpPr>
+          <p:nvPr/>
+        </p:nvSpPr>
+        <p:spPr>
           <a:xfrm>
             <a:off x="6504300" y="4080808"/>
             <a:ext cx="5295900" cy="400050"/>
@@ -9745,8 +9701,8 @@
           <a:ln w="0">
             <a:noFill/>
           </a:ln>
-        </ns0:spPr>
-        <ns0:txBody>
+        </p:spPr>
+        <p:txBody>
           <a:bodyPr wrap="square" lIns="0" tIns="0" rIns="0" bIns="0" anchor="t"/>
           <a:lstStyle/>
           <a:p>
@@ -9776,23 +9732,23 @@
               <a:t>: Business Goods; Services and Tradespeople; Jobs</a:t>
             </a:r>
           </a:p>
-        </ns0:txBody>
-      </ns0:sp>
-      <ns0:sp>
-        <ns0:nvSpPr>
-          <ns0:cNvPr id="40" name="Example why">
-            <a:extLst>
-              <a:ext uri="{FF2B5EF4-FFF2-40B4-BE49-F238E27FC236}">
-                <ns2:creationId id="{68867B21-8782-4DF8-8880-22929423EB02}"/>
-              </a:ext>
-            </a:extLst>
-          </ns0:cNvPr>
-          <ns0:cNvSpPr>
-            <a:spLocks noGrp="1"/>
-          </ns0:cNvSpPr>
-          <ns0:nvPr/>
-        </ns0:nvSpPr>
-        <ns0:spPr>
+        </p:txBody>
+      </p:sp>
+      <p:sp>
+        <p:nvSpPr>
+          <p:cNvPr id="40" name="Example why">
+            <a:extLst>
+              <a:ext uri="{FF2B5EF4-FFF2-40B4-BE49-F238E27FC236}">
+                <a16:creationId xmlns:a16="http://schemas.microsoft.com/office/drawing/2014/main" id="{68867B21-8782-4DF8-8880-22929423EB02}"/>
+              </a:ext>
+            </a:extLst>
+          </p:cNvPr>
+          <p:cNvSpPr>
+            <a:spLocks noGrp="1"/>
+          </p:cNvSpPr>
+          <p:nvPr/>
+        </p:nvSpPr>
+        <p:spPr>
           <a:xfrm>
             <a:off x="6504300" y="4499908"/>
             <a:ext cx="5295900" cy="400050"/>
@@ -9804,8 +9760,8 @@
           <a:ln w="0">
             <a:noFill/>
           </a:ln>
-        </ns0:spPr>
-        <ns0:txBody>
+        </p:spPr>
+        <p:txBody>
           <a:bodyPr wrap="square" lIns="0" tIns="0" rIns="0" bIns="0" anchor="t"/>
           <a:lstStyle/>
           <a:p>
@@ -9824,23 +9780,23 @@
               <a:t>Lower threshold: the category itself is closer to business activity.</a:t>
             </a:r>
           </a:p>
-        </ns0:txBody>
-      </ns0:sp>
-      <ns0:sp>
-        <ns0:nvSpPr>
-          <ns0:cNvPr id="41" name="Example item divider">
-            <a:extLst>
-              <a:ext uri="{FF2B5EF4-FFF2-40B4-BE49-F238E27FC236}">
-                <ns2:creationId id="{46290ABC-8BFD-49DD-91E3-CB896903A01E}"/>
-              </a:ext>
-            </a:extLst>
-          </ns0:cNvPr>
-          <ns0:cNvSpPr>
-            <a:spLocks noGrp="1"/>
-          </ns0:cNvSpPr>
-          <ns0:nvPr/>
-        </ns0:nvSpPr>
-        <ns0:spPr>
+        </p:txBody>
+      </p:sp>
+      <p:sp>
+        <p:nvSpPr>
+          <p:cNvPr id="41" name="Example item divider">
+            <a:extLst>
+              <a:ext uri="{FF2B5EF4-FFF2-40B4-BE49-F238E27FC236}">
+                <a16:creationId xmlns:a16="http://schemas.microsoft.com/office/drawing/2014/main" id="{46290ABC-8BFD-49DD-91E3-CB896903A01E}"/>
+              </a:ext>
+            </a:extLst>
+          </p:cNvPr>
+          <p:cNvSpPr>
+            <a:spLocks noGrp="1"/>
+          </p:cNvSpPr>
+          <p:nvPr/>
+        </p:nvSpPr>
+        <p:spPr>
           <a:xfrm>
             <a:off x="609600" y="4899958"/>
             <a:ext cx="5295900" cy="9525"/>
@@ -9853,30 +9809,30 @@
               <a:srgbClr val="1C1C1C"/>
             </a:solidFill>
           </a:ln>
-        </ns0:spPr>
-        <ns0:txBody>
+        </p:spPr>
+        <p:txBody>
           <a:bodyPr/>
           <a:lstStyle/>
           <a:p>
             <a:endParaRPr/>
           </a:p>
-        </ns0:txBody>
-      </ns0:sp>
-      <ns0:sp>
-        <ns0:nvSpPr>
-          <ns0:cNvPr id="42" name="Example categories">
-            <a:extLst>
-              <a:ext uri="{FF2B5EF4-FFF2-40B4-BE49-F238E27FC236}">
-                <ns2:creationId id="{81EB442F-FC8F-40E9-8077-ABF9D2585C70}"/>
-              </a:ext>
-            </a:extLst>
-          </ns0:cNvPr>
-          <ns0:cNvSpPr>
-            <a:spLocks noGrp="1"/>
-          </ns0:cNvSpPr>
-          <ns0:nvPr/>
-        </ns0:nvSpPr>
-        <ns0:spPr>
+        </p:txBody>
+      </p:sp>
+      <p:sp>
+        <p:nvSpPr>
+          <p:cNvPr id="42" name="Example categories">
+            <a:extLst>
+              <a:ext uri="{FF2B5EF4-FFF2-40B4-BE49-F238E27FC236}">
+                <a16:creationId xmlns:a16="http://schemas.microsoft.com/office/drawing/2014/main" id="{81EB442F-FC8F-40E9-8077-ABF9D2585C70}"/>
+              </a:ext>
+            </a:extLst>
+          </p:cNvPr>
+          <p:cNvSpPr>
+            <a:spLocks noGrp="1"/>
+          </p:cNvSpPr>
+          <p:nvPr/>
+        </p:nvSpPr>
+        <p:spPr>
           <a:xfrm>
             <a:off x="609600" y="4985683"/>
             <a:ext cx="5295900" cy="400050"/>
@@ -9888,8 +9844,8 @@
           <a:ln w="0">
             <a:noFill/>
           </a:ln>
-        </ns0:spPr>
-        <ns0:txBody>
+        </p:spPr>
+        <p:txBody>
           <a:bodyPr wrap="square" lIns="0" tIns="0" rIns="0" bIns="0" anchor="t"/>
           <a:lstStyle/>
           <a:p>
@@ -9919,23 +9875,23 @@
               <a:t>: Clothing - Women; Clothing - Men; Books; Children and Babies; CDs and DVDs; Games</a:t>
             </a:r>
           </a:p>
-        </ns0:txBody>
-      </ns0:sp>
-      <ns0:sp>
-        <ns0:nvSpPr>
-          <ns0:cNvPr id="43" name="Example why">
-            <a:extLst>
-              <a:ext uri="{FF2B5EF4-FFF2-40B4-BE49-F238E27FC236}">
-                <ns2:creationId id="{F4F683C7-B8B2-495B-9A05-8AE2430F2B8D}"/>
-              </a:ext>
-            </a:extLst>
-          </ns0:cNvPr>
-          <ns0:cNvSpPr>
-            <a:spLocks noGrp="1"/>
-          </ns0:cNvSpPr>
-          <ns0:nvPr/>
-        </ns0:nvSpPr>
-        <ns0:spPr>
+        </p:txBody>
+      </p:sp>
+      <p:sp>
+        <p:nvSpPr>
+          <p:cNvPr id="43" name="Example why">
+            <a:extLst>
+              <a:ext uri="{FF2B5EF4-FFF2-40B4-BE49-F238E27FC236}">
+                <a16:creationId xmlns:a16="http://schemas.microsoft.com/office/drawing/2014/main" id="{F4F683C7-B8B2-495B-9A05-8AE2430F2B8D}"/>
+              </a:ext>
+            </a:extLst>
+          </p:cNvPr>
+          <p:cNvSpPr>
+            <a:spLocks noGrp="1"/>
+          </p:cNvSpPr>
+          <p:nvPr/>
+        </p:nvSpPr>
+        <p:spPr>
           <a:xfrm>
             <a:off x="609600" y="5404783"/>
             <a:ext cx="5295900" cy="400050"/>
@@ -9947,8 +9903,8 @@
           <a:ln w="0">
             <a:noFill/>
           </a:ln>
-        </ns0:spPr>
-        <ns0:txBody>
+        </p:spPr>
+        <p:txBody>
           <a:bodyPr wrap="square" lIns="0" tIns="0" rIns="0" bIns="0" anchor="t"/>
           <a:lstStyle/>
           <a:p>
@@ -9967,23 +9923,23 @@
               <a:t>Higher threshold: several listings can still be normal household selling.</a:t>
             </a:r>
           </a:p>
-        </ns0:txBody>
-      </ns0:sp>
-      <ns0:sp>
-        <ns0:nvSpPr>
-          <ns0:cNvPr id="44" name="Example item divider">
-            <a:extLst>
-              <a:ext uri="{FF2B5EF4-FFF2-40B4-BE49-F238E27FC236}">
-                <ns2:creationId id="{270BFA4F-4A2C-451F-878F-365194EE9BFD}"/>
-              </a:ext>
-            </a:extLst>
-          </ns0:cNvPr>
-          <ns0:cNvSpPr>
-            <a:spLocks noGrp="1"/>
-          </ns0:cNvSpPr>
-          <ns0:nvPr/>
-        </ns0:nvSpPr>
-        <ns0:spPr>
+        </p:txBody>
+      </p:sp>
+      <p:sp>
+        <p:nvSpPr>
+          <p:cNvPr id="44" name="Example item divider">
+            <a:extLst>
+              <a:ext uri="{FF2B5EF4-FFF2-40B4-BE49-F238E27FC236}">
+                <a16:creationId xmlns:a16="http://schemas.microsoft.com/office/drawing/2014/main" id="{270BFA4F-4A2C-451F-878F-365194EE9BFD}"/>
+              </a:ext>
+            </a:extLst>
+          </p:cNvPr>
+          <p:cNvSpPr>
+            <a:spLocks noGrp="1"/>
+          </p:cNvSpPr>
+          <p:nvPr/>
+        </p:nvSpPr>
+        <p:spPr>
           <a:xfrm>
             <a:off x="6504300" y="4899958"/>
             <a:ext cx="5295900" cy="9525"/>
@@ -9996,30 +9952,30 @@
               <a:srgbClr val="1C1C1C"/>
             </a:solidFill>
           </a:ln>
-        </ns0:spPr>
-        <ns0:txBody>
+        </p:spPr>
+        <p:txBody>
           <a:bodyPr/>
           <a:lstStyle/>
           <a:p>
             <a:endParaRPr/>
           </a:p>
-        </ns0:txBody>
-      </ns0:sp>
-      <ns0:sp>
-        <ns0:nvSpPr>
-          <ns0:cNvPr id="45" name="Example categories">
-            <a:extLst>
-              <a:ext uri="{FF2B5EF4-FFF2-40B4-BE49-F238E27FC236}">
-                <ns2:creationId id="{E7993DFD-C6D0-4236-B790-67BBBC329E2F}"/>
-              </a:ext>
-            </a:extLst>
-          </ns0:cNvPr>
-          <ns0:cNvSpPr>
-            <a:spLocks noGrp="1"/>
-          </ns0:cNvSpPr>
-          <ns0:nvPr/>
-        </ns0:nvSpPr>
-        <ns0:spPr>
+        </p:txBody>
+      </p:sp>
+      <p:sp>
+        <p:nvSpPr>
+          <p:cNvPr id="45" name="Example categories">
+            <a:extLst>
+              <a:ext uri="{FF2B5EF4-FFF2-40B4-BE49-F238E27FC236}">
+                <a16:creationId xmlns:a16="http://schemas.microsoft.com/office/drawing/2014/main" id="{E7993DFD-C6D0-4236-B790-67BBBC329E2F}"/>
+              </a:ext>
+            </a:extLst>
+          </p:cNvPr>
+          <p:cNvSpPr>
+            <a:spLocks noGrp="1"/>
+          </p:cNvSpPr>
+          <p:nvPr/>
+        </p:nvSpPr>
+        <p:spPr>
           <a:xfrm>
             <a:off x="6504300" y="4985683"/>
             <a:ext cx="5295900" cy="400050"/>
@@ -10031,8 +9987,8 @@
           <a:ln w="0">
             <a:noFill/>
           </a:ln>
-        </ns0:spPr>
-        <ns0:txBody>
+        </p:spPr>
+        <p:txBody>
           <a:bodyPr wrap="square" lIns="0" tIns="0" rIns="0" bIns="0" anchor="t"/>
           <a:lstStyle/>
           <a:p>
@@ -10062,23 +10018,23 @@
               <a:t>: Miscellaneous; Home and Furnishings; Garden and Terrace; Hobby and Leisure; Collectibles</a:t>
             </a:r>
           </a:p>
-        </ns0:txBody>
-      </ns0:sp>
-      <ns0:sp>
-        <ns0:nvSpPr>
-          <ns0:cNvPr id="46" name="Example why">
-            <a:extLst>
-              <a:ext uri="{FF2B5EF4-FFF2-40B4-BE49-F238E27FC236}">
-                <ns2:creationId id="{0B46B18E-296E-4763-8294-A758936DF528}"/>
-              </a:ext>
-            </a:extLst>
-          </ns0:cNvPr>
-          <ns0:cNvSpPr>
-            <a:spLocks noGrp="1"/>
-          </ns0:cNvSpPr>
-          <ns0:nvPr/>
-        </ns0:nvSpPr>
-        <ns0:spPr>
+        </p:txBody>
+      </p:sp>
+      <p:sp>
+        <p:nvSpPr>
+          <p:cNvPr id="46" name="Example why">
+            <a:extLst>
+              <a:ext uri="{FF2B5EF4-FFF2-40B4-BE49-F238E27FC236}">
+                <a16:creationId xmlns:a16="http://schemas.microsoft.com/office/drawing/2014/main" id="{0B46B18E-296E-4763-8294-A758936DF528}"/>
+              </a:ext>
+            </a:extLst>
+          </p:cNvPr>
+          <p:cNvSpPr>
+            <a:spLocks noGrp="1"/>
+          </p:cNvSpPr>
+          <p:nvPr/>
+        </p:nvSpPr>
+        <p:spPr>
           <a:xfrm>
             <a:off x="6504300" y="5404783"/>
             <a:ext cx="5295900" cy="400050"/>
@@ -10090,8 +10046,8 @@
           <a:ln w="0">
             <a:noFill/>
           </a:ln>
-        </ns0:spPr>
-        <ns0:txBody>
+        </p:spPr>
+        <p:txBody>
           <a:bodyPr wrap="square" lIns="0" tIns="0" rIns="0" bIns="0" anchor="t"/>
           <a:lstStyle/>
           <a:p>
@@ -10110,19 +10066,19 @@
               <a:t>Higher threshold or require another signal, because category alone is noisy.</a:t>
             </a:r>
           </a:p>
-        </ns0:txBody>
-      </ns0:sp>
-    </ns0:spTree>
-    <ns0:extLst>
-      <ns0:ext uri="{BB962C8B-B14F-4D97-AF65-F5344CB8AC3E}">
-        <ns3:creationId val="1630150295"/>
-      </ns0:ext>
-    </ns0:extLst>
-  </ns0:cSld>
-  <ns0:clrMapOvr>
+        </p:txBody>
+      </p:sp>
+    </p:spTree>
+    <p:extLst>
+      <p:ext uri="{BB962C8B-B14F-4D97-AF65-F5344CB8AC3E}">
+        <p14:creationId xmlns:p14="http://schemas.microsoft.com/office/powerpoint/2010/main" val="1630150295"/>
+      </p:ext>
+    </p:extLst>
+  </p:cSld>
+  <p:clrMapOvr>
     <a:masterClrMapping/>
-  </ns0:clrMapOvr>
-</ns0:sld>
+  </p:clrMapOvr>
+</p:sld>
 </file>
 
 <file path=ppt/slides/slide7.xml><?xml version="1.0" encoding="utf-8"?>

--- a/deliverables/smb_bundles/smb_bundles_1_identify.pptx
+++ b/deliverables/smb_bundles/smb_bundles_1_identify.pptx
@@ -122,6 +122,143 @@
 </p:presentation>
 </file>
 
+<file path=ppt/authors.xml><?xml version="1.0" encoding="utf-8"?>
+<p188:authorLst xmlns:a="http://schemas.openxmlformats.org/drawingml/2006/main" xmlns:r="http://schemas.openxmlformats.org/officeDocument/2006/relationships" xmlns:p188="http://schemas.microsoft.com/office/powerpoint/2018/8/main">
+  <p188:author id="{415BEED1-CB72-B48E-F02F-A910FFABA975}" name="Omer Tal" initials="OT" userId="4873ff6cd3b5db54" providerId="Windows Live"/>
+</p188:authorLst>
+</file>
+
+<file path=ppt/comments/modernComment_101_5D540259.xml><?xml version="1.0" encoding="utf-8"?>
+<p188:cmLst xmlns:a="http://schemas.openxmlformats.org/drawingml/2006/main" xmlns:r="http://schemas.openxmlformats.org/officeDocument/2006/relationships" xmlns:p188="http://schemas.microsoft.com/office/powerpoint/2018/8/main">
+  <p188:cm id="{EEDB1040-B1A8-934B-AD3D-2513803A409B}" authorId="{415BEED1-CB72-B48E-F02F-A910FFABA975}" created="2026-06-15T20:10:53.991">
+    <ac:deMkLst xmlns:ac="http://schemas.microsoft.com/office/drawing/2013/main/command">
+      <pc:docMk xmlns:pc="http://schemas.microsoft.com/office/powerpoint/2013/main/command"/>
+      <pc:sldMk xmlns:pc="http://schemas.microsoft.com/office/powerpoint/2013/main/command" cId="1565786713" sldId="257"/>
+      <ac:spMk id="46" creationId="{47D1F815-DDE6-4E60-B387-97C475589306}"/>
+    </ac:deMkLst>
+    <p188:txBody>
+      <a:bodyPr/>
+      <a:lstStyle/>
+      <a:p>
+        <a:r>
+          <a:rPr lang="en-US"/>
+          <a:t>remove</a:t>
+        </a:r>
+      </a:p>
+    </p188:txBody>
+  </p188:cm>
+  <p188:cm id="{254AA85D-B778-034B-B2D2-D1BC2066CA44}" authorId="{415BEED1-CB72-B48E-F02F-A910FFABA975}" created="2026-06-15T20:11:12.574">
+    <ac:deMkLst xmlns:ac="http://schemas.microsoft.com/office/drawing/2013/main/command">
+      <pc:docMk xmlns:pc="http://schemas.microsoft.com/office/powerpoint/2013/main/command"/>
+      <pc:sldMk xmlns:pc="http://schemas.microsoft.com/office/powerpoint/2013/main/command" cId="1565786713" sldId="257"/>
+      <ac:spMk id="10" creationId="{2178FA77-A0E9-4651-8A84-AC52DF717621}"/>
+    </ac:deMkLst>
+    <p188:txBody>
+      <a:bodyPr/>
+      <a:lstStyle/>
+      <a:p>
+        <a:r>
+          <a:rPr lang="en-US"/>
+          <a:t>do not get into details</a:t>
+        </a:r>
+      </a:p>
+    </p188:txBody>
+  </p188:cm>
+</p188:cmLst>
+</file>
+
+<file path=ppt/comments/modernComment_103_67150090.xml><?xml version="1.0" encoding="utf-8"?>
+<p188:cmLst xmlns:a="http://schemas.openxmlformats.org/drawingml/2006/main" xmlns:r="http://schemas.openxmlformats.org/officeDocument/2006/relationships" xmlns:p188="http://schemas.microsoft.com/office/powerpoint/2018/8/main">
+  <p188:cm id="{0BB568F2-B6FB-764D-A7C3-AD5A6465D937}" authorId="{415BEED1-CB72-B48E-F02F-A910FFABA975}" created="2026-06-15T20:12:44.574">
+    <ac:deMkLst xmlns:ac="http://schemas.microsoft.com/office/drawing/2013/main/command">
+      <pc:docMk xmlns:pc="http://schemas.microsoft.com/office/powerpoint/2013/main/command"/>
+      <pc:sldMk xmlns:pc="http://schemas.microsoft.com/office/powerpoint/2013/main/command" cId="1729429648" sldId="259"/>
+      <ac:graphicFrameMk id="17" creationId="{00000000-0000-0000-0000-000000000000}"/>
+    </ac:deMkLst>
+    <p188:txBody>
+      <a:bodyPr/>
+      <a:lstStyle/>
+      <a:p>
+        <a:r>
+          <a:rPr lang="en-US"/>
+          <a:t>reorder: CPC, Invoice amount first</a:t>
+        </a:r>
+      </a:p>
+    </p188:txBody>
+  </p188:cm>
+</p188:cmLst>
+</file>
+
+<file path=ppt/comments/modernComment_106_66FA96F5.xml><?xml version="1.0" encoding="utf-8"?>
+<p188:cmLst xmlns:a="http://schemas.openxmlformats.org/drawingml/2006/main" xmlns:r="http://schemas.openxmlformats.org/officeDocument/2006/relationships" xmlns:p188="http://schemas.microsoft.com/office/powerpoint/2018/8/main">
+  <p188:cm id="{4457C0FB-C6B6-B64D-9351-EF8663339985}" authorId="{415BEED1-CB72-B48E-F02F-A910FFABA975}" created="2026-06-15T19:31:56.213">
+    <pc:sldMkLst xmlns:pc="http://schemas.microsoft.com/office/powerpoint/2013/main/command">
+      <pc:docMk/>
+      <pc:sldMk cId="1727698677" sldId="262"/>
+    </pc:sldMkLst>
+    <p188:txBody>
+      <a:bodyPr/>
+      <a:lstStyle/>
+      <a:p>
+        <a:r>
+          <a:rPr lang="en-US"/>
+          <a:t>Remove this signal</a:t>
+        </a:r>
+      </a:p>
+    </p188:txBody>
+  </p188:cm>
+</p188:cmLst>
+</file>
+
+<file path=ppt/comments/modernComment_107_4490B3C.xml><?xml version="1.0" encoding="utf-8"?>
+<p188:cmLst xmlns:a="http://schemas.openxmlformats.org/drawingml/2006/main" xmlns:r="http://schemas.openxmlformats.org/officeDocument/2006/relationships" xmlns:p188="http://schemas.microsoft.com/office/powerpoint/2018/8/main">
+  <p188:cm id="{EC7A623E-11A8-EB4D-A9D4-A9CFC9D399BF}" authorId="{415BEED1-CB72-B48E-F02F-A910FFABA975}" created="2026-06-15T19:33:23.080">
+    <ac:txMkLst xmlns:ac="http://schemas.microsoft.com/office/drawing/2013/main/command">
+      <pc:docMk xmlns:pc="http://schemas.microsoft.com/office/powerpoint/2013/main/command"/>
+      <pc:sldMk xmlns:pc="http://schemas.microsoft.com/office/powerpoint/2013/main/command" cId="71895868" sldId="263"/>
+      <ac:graphicFrameMk id="10" creationId="{00000000-0000-0000-0000-000000000000}"/>
+      <ac:tblMk/>
+      <ac:tcMk rowId="10003" colId="20001"/>
+      <ac:txMk cp="0" len="45">
+        <ac:context len="46" hash="2602481956"/>
+      </ac:txMk>
+    </ac:txMkLst>
+    <p188:pos x="4442883" y="1454083"/>
+    <p188:txBody>
+      <a:bodyPr/>
+      <a:lstStyle/>
+      <a:p>
+        <a:r>
+          <a:rPr lang="en-US"/>
+          <a:t>rephrase</a:t>
+        </a:r>
+      </a:p>
+    </p188:txBody>
+  </p188:cm>
+  <p188:cm id="{C8FDF3E7-26C1-A548-A8B3-ED9686E3BE31}" authorId="{415BEED1-CB72-B48E-F02F-A910FFABA975}" created="2026-06-15T19:33:49.879">
+    <ac:txMkLst xmlns:ac="http://schemas.microsoft.com/office/drawing/2013/main/command">
+      <pc:docMk xmlns:pc="http://schemas.microsoft.com/office/powerpoint/2013/main/command"/>
+      <pc:sldMk xmlns:pc="http://schemas.microsoft.com/office/powerpoint/2013/main/command" cId="71895868" sldId="263"/>
+      <ac:spMk id="12" creationId="{E6D23BF3-2401-4FDA-BDDF-486C1AD3B8B9}"/>
+      <ac:txMk cp="0" len="101">
+        <ac:context len="102" hash="1162065837"/>
+      </ac:txMk>
+    </ac:txMkLst>
+    <p188:pos x="6525683" y="338600"/>
+    <p188:txBody>
+      <a:bodyPr/>
+      <a:lstStyle/>
+      <a:p>
+        <a:r>
+          <a:rPr lang="en-US"/>
+          <a:t>rephrase</a:t>
+        </a:r>
+      </a:p>
+    </p188:txBody>
+  </p188:cm>
+</p188:cmLst>
+</file>
+
 <file path=ppt/notesMasters/notesMaster1.xml><?xml version="1.0" encoding="utf-8"?>
 <p:notesMaster xmlns:a="http://schemas.openxmlformats.org/drawingml/2006/main" xmlns:r="http://schemas.openxmlformats.org/officeDocument/2006/relationships" xmlns:p="http://schemas.openxmlformats.org/presentationml/2006/main">
   <p:cSld>
@@ -787,7 +924,7 @@
           <a:bodyPr/>
           <a:lstStyle/>
           <a:p>
-            <a:endParaRPr/>
+            <a:endParaRPr dirty="0"/>
           </a:p>
         </p:txBody>
       </p:sp>
@@ -2296,7 +2433,7 @@
               <a:buNone/>
             </a:pPr>
             <a:r>
-              <a:rPr sz="1800" b="1">
+              <a:rPr sz="1800" b="1" dirty="0">
                 <a:solidFill>
                   <a:srgbClr val="FFD426"/>
                 </a:solidFill>
@@ -2329,7 +2466,9 @@
             <a:ext cx="2087880" cy="1466850"/>
           </a:xfrm>
           <a:prstGeom prst="roundRect">
-            <a:avLst/>
+            <a:avLst>
+              <a:gd name="adj" fmla="val 7000"/>
+            </a:avLst>
           </a:prstGeom>
           <a:solidFill>
             <a:srgbClr val="0E0E0E"/>
@@ -2344,6 +2483,7 @@
           <a:bodyPr/>
           <a:lstStyle/>
           <a:p>
+            <a:pPr marL="0" indent="0" algn="l" defTabSz="914400" rtl="0"/>
             <a:endParaRPr/>
           </a:p>
         </p:txBody>
@@ -2447,168 +2587,6 @@
       </p:sp>
       <p:sp>
         <p:nvSpPr>
-          <p:cNvPr id="14" name="Signal bullet">
-            <a:extLst>
-              <a:ext uri="{FF2B5EF4-FFF2-40B4-BE49-F238E27FC236}">
-                <a16:creationId xmlns:a16="http://schemas.microsoft.com/office/drawing/2014/main" id="{7B56A51E-5F3E-422F-80C4-58E8EE88FB23}"/>
-              </a:ext>
-            </a:extLst>
-          </p:cNvPr>
-          <p:cNvSpPr>
-            <a:spLocks noGrp="1"/>
-          </p:cNvSpPr>
-          <p:nvPr/>
-        </p:nvSpPr>
-        <p:spPr>
-          <a:xfrm>
-            <a:off x="781050" y="3215712"/>
-            <a:ext cx="66675" cy="66675"/>
-          </a:xfrm>
-          <a:prstGeom prst="ellipse">
-            <a:avLst/>
-          </a:prstGeom>
-          <a:solidFill>
-            <a:srgbClr val="FFD426"/>
-          </a:solidFill>
-          <a:ln w="0">
-            <a:noFill/>
-          </a:ln>
-        </p:spPr>
-        <p:txBody>
-          <a:bodyPr/>
-          <a:lstStyle/>
-          <a:p>
-            <a:endParaRPr/>
-          </a:p>
-        </p:txBody>
-      </p:sp>
-      <p:sp>
-        <p:nvSpPr>
-          <p:cNvPr id="15" name="Business Setup item">
-            <a:extLst>
-              <a:ext uri="{FF2B5EF4-FFF2-40B4-BE49-F238E27FC236}">
-                <a16:creationId xmlns:a16="http://schemas.microsoft.com/office/drawing/2014/main" id="{B4FC3418-FD5C-45BD-AC2C-BC074CB59259}"/>
-              </a:ext>
-            </a:extLst>
-          </p:cNvPr>
-          <p:cNvSpPr>
-            <a:spLocks noGrp="1"/>
-          </p:cNvSpPr>
-          <p:nvPr/>
-        </p:nvSpPr>
-        <p:spPr>
-          <a:xfrm>
-            <a:off x="914400" y="3149037"/>
-            <a:ext cx="1630680" cy="323850"/>
-          </a:xfrm>
-          <a:prstGeom prst="rect">
-            <a:avLst/>
-          </a:prstGeom>
-        </p:spPr>
-        <p:txBody>
-          <a:bodyPr wrap="square" lIns="0" tIns="0" rIns="0" bIns="0" anchor="t"/>
-          <a:lstStyle/>
-          <a:p>
-            <a:pPr marL="0" indent="0">
-              <a:buNone/>
-            </a:pPr>
-            <a:r>
-              <a:rPr sz="1300">
-                <a:solidFill>
-                  <a:srgbClr val="D8D8D2"/>
-                </a:solidFill>
-                <a:latin typeface="Arial"/>
-                <a:ea typeface="Arial"/>
-                <a:cs typeface="Arial"/>
-              </a:rPr>
-              <a:t>Corporate bank flag</a:t>
-            </a:r>
-          </a:p>
-        </p:txBody>
-      </p:sp>
-      <p:sp>
-        <p:nvSpPr>
-          <p:cNvPr id="16" name="Signal bullet">
-            <a:extLst>
-              <a:ext uri="{FF2B5EF4-FFF2-40B4-BE49-F238E27FC236}">
-                <a16:creationId xmlns:a16="http://schemas.microsoft.com/office/drawing/2014/main" id="{B14A1CE9-D141-4F64-A7EF-D4B4BF92A59E}"/>
-              </a:ext>
-            </a:extLst>
-          </p:cNvPr>
-          <p:cNvSpPr>
-            <a:spLocks noGrp="1"/>
-          </p:cNvSpPr>
-          <p:nvPr/>
-        </p:nvSpPr>
-        <p:spPr>
-          <a:xfrm>
-            <a:off x="781050" y="3625287"/>
-            <a:ext cx="66675" cy="66675"/>
-          </a:xfrm>
-          <a:prstGeom prst="ellipse">
-            <a:avLst/>
-          </a:prstGeom>
-          <a:solidFill>
-            <a:srgbClr val="FFD426"/>
-          </a:solidFill>
-          <a:ln w="0">
-            <a:noFill/>
-          </a:ln>
-        </p:spPr>
-        <p:txBody>
-          <a:bodyPr/>
-          <a:lstStyle/>
-          <a:p>
-            <a:endParaRPr/>
-          </a:p>
-        </p:txBody>
-      </p:sp>
-      <p:sp>
-        <p:nvSpPr>
-          <p:cNvPr id="17" name="Business Setup item">
-            <a:extLst>
-              <a:ext uri="{FF2B5EF4-FFF2-40B4-BE49-F238E27FC236}">
-                <a16:creationId xmlns:a16="http://schemas.microsoft.com/office/drawing/2014/main" id="{B469ED38-7D8B-4DE8-9700-530B606571D5}"/>
-              </a:ext>
-            </a:extLst>
-          </p:cNvPr>
-          <p:cNvSpPr>
-            <a:spLocks noGrp="1"/>
-          </p:cNvSpPr>
-          <p:nvPr/>
-        </p:nvSpPr>
-        <p:spPr>
-          <a:xfrm>
-            <a:off x="914400" y="3558612"/>
-            <a:ext cx="1630680" cy="323850"/>
-          </a:xfrm>
-          <a:prstGeom prst="rect">
-            <a:avLst/>
-          </a:prstGeom>
-        </p:spPr>
-        <p:txBody>
-          <a:bodyPr wrap="square" lIns="0" tIns="0" rIns="0" bIns="0" anchor="t"/>
-          <a:lstStyle/>
-          <a:p>
-            <a:pPr marL="0" indent="0">
-              <a:buNone/>
-            </a:pPr>
-            <a:r>
-              <a:rPr sz="1300">
-                <a:solidFill>
-                  <a:srgbClr val="D8D8D2"/>
-                </a:solidFill>
-                <a:latin typeface="Arial"/>
-                <a:ea typeface="Arial"/>
-                <a:cs typeface="Arial"/>
-              </a:rPr>
-              <a:t>External URL</a:t>
-            </a:r>
-          </a:p>
-        </p:txBody>
-      </p:sp>
-      <p:sp>
-        <p:nvSpPr>
           <p:cNvPr id="18" name="Paid Usage card">
             <a:extLst>
               <a:ext uri="{FF2B5EF4-FFF2-40B4-BE49-F238E27FC236}">
@@ -2627,7 +2605,9 @@
             <a:ext cx="2087880" cy="1466850"/>
           </a:xfrm>
           <a:prstGeom prst="roundRect">
-            <a:avLst/>
+            <a:avLst>
+              <a:gd name="adj" fmla="val 7000"/>
+            </a:avLst>
           </a:prstGeom>
           <a:solidFill>
             <a:srgbClr val="0E0E0E"/>
@@ -2742,168 +2722,6 @@
       </p:sp>
       <p:sp>
         <p:nvSpPr>
-          <p:cNvPr id="21" name="Signal bullet">
-            <a:extLst>
-              <a:ext uri="{FF2B5EF4-FFF2-40B4-BE49-F238E27FC236}">
-                <a16:creationId xmlns:a16="http://schemas.microsoft.com/office/drawing/2014/main" id="{CA725DE6-45B1-4EFE-B3C9-EF75F8B52A9A}"/>
-              </a:ext>
-            </a:extLst>
-          </p:cNvPr>
-          <p:cNvSpPr>
-            <a:spLocks noGrp="1"/>
-          </p:cNvSpPr>
-          <p:nvPr/>
-        </p:nvSpPr>
-        <p:spPr>
-          <a:xfrm>
-            <a:off x="3002280" y="3215712"/>
-            <a:ext cx="66675" cy="66675"/>
-          </a:xfrm>
-          <a:prstGeom prst="ellipse">
-            <a:avLst/>
-          </a:prstGeom>
-          <a:solidFill>
-            <a:srgbClr val="FFD426"/>
-          </a:solidFill>
-          <a:ln w="0">
-            <a:noFill/>
-          </a:ln>
-        </p:spPr>
-        <p:txBody>
-          <a:bodyPr/>
-          <a:lstStyle/>
-          <a:p>
-            <a:endParaRPr/>
-          </a:p>
-        </p:txBody>
-      </p:sp>
-      <p:sp>
-        <p:nvSpPr>
-          <p:cNvPr id="22" name="Paid Usage item">
-            <a:extLst>
-              <a:ext uri="{FF2B5EF4-FFF2-40B4-BE49-F238E27FC236}">
-                <a16:creationId xmlns:a16="http://schemas.microsoft.com/office/drawing/2014/main" id="{0675CBDE-5BDB-4CA7-ABBF-BA7C7327CCA2}"/>
-              </a:ext>
-            </a:extLst>
-          </p:cNvPr>
-          <p:cNvSpPr>
-            <a:spLocks noGrp="1"/>
-          </p:cNvSpPr>
-          <p:nvPr/>
-        </p:nvSpPr>
-        <p:spPr>
-          <a:xfrm>
-            <a:off x="3135630" y="3149037"/>
-            <a:ext cx="1630680" cy="323850"/>
-          </a:xfrm>
-          <a:prstGeom prst="rect">
-            <a:avLst/>
-          </a:prstGeom>
-        </p:spPr>
-        <p:txBody>
-          <a:bodyPr wrap="square" lIns="0" tIns="0" rIns="0" bIns="0" anchor="t"/>
-          <a:lstStyle/>
-          <a:p>
-            <a:pPr marL="0" indent="0">
-              <a:buNone/>
-            </a:pPr>
-            <a:r>
-              <a:rPr sz="1300">
-                <a:solidFill>
-                  <a:srgbClr val="D8D8D2"/>
-                </a:solidFill>
-                <a:latin typeface="Arial"/>
-                <a:ea typeface="Arial"/>
-                <a:cs typeface="Arial"/>
-              </a:rPr>
-              <a:t>Paid features</a:t>
-            </a:r>
-          </a:p>
-        </p:txBody>
-      </p:sp>
-      <p:sp>
-        <p:nvSpPr>
-          <p:cNvPr id="23" name="Signal bullet">
-            <a:extLst>
-              <a:ext uri="{FF2B5EF4-FFF2-40B4-BE49-F238E27FC236}">
-                <a16:creationId xmlns:a16="http://schemas.microsoft.com/office/drawing/2014/main" id="{21856CE8-A264-4587-95B3-029FD2FBDEDD}"/>
-              </a:ext>
-            </a:extLst>
-          </p:cNvPr>
-          <p:cNvSpPr>
-            <a:spLocks noGrp="1"/>
-          </p:cNvSpPr>
-          <p:nvPr/>
-        </p:nvSpPr>
-        <p:spPr>
-          <a:xfrm>
-            <a:off x="3002280" y="3625287"/>
-            <a:ext cx="66675" cy="66675"/>
-          </a:xfrm>
-          <a:prstGeom prst="ellipse">
-            <a:avLst/>
-          </a:prstGeom>
-          <a:solidFill>
-            <a:srgbClr val="FFD426"/>
-          </a:solidFill>
-          <a:ln w="0">
-            <a:noFill/>
-          </a:ln>
-        </p:spPr>
-        <p:txBody>
-          <a:bodyPr/>
-          <a:lstStyle/>
-          <a:p>
-            <a:endParaRPr/>
-          </a:p>
-        </p:txBody>
-      </p:sp>
-      <p:sp>
-        <p:nvSpPr>
-          <p:cNvPr id="24" name="Paid Usage item">
-            <a:extLst>
-              <a:ext uri="{FF2B5EF4-FFF2-40B4-BE49-F238E27FC236}">
-                <a16:creationId xmlns:a16="http://schemas.microsoft.com/office/drawing/2014/main" id="{77ECC5B7-96DB-4BA4-BF5D-832D68C65387}"/>
-              </a:ext>
-            </a:extLst>
-          </p:cNvPr>
-          <p:cNvSpPr>
-            <a:spLocks noGrp="1"/>
-          </p:cNvSpPr>
-          <p:nvPr/>
-        </p:nvSpPr>
-        <p:spPr>
-          <a:xfrm>
-            <a:off x="3135630" y="3558612"/>
-            <a:ext cx="1630680" cy="323850"/>
-          </a:xfrm>
-          <a:prstGeom prst="rect">
-            <a:avLst/>
-          </a:prstGeom>
-        </p:spPr>
-        <p:txBody>
-          <a:bodyPr wrap="square" lIns="0" tIns="0" rIns="0" bIns="0" anchor="t"/>
-          <a:lstStyle/>
-          <a:p>
-            <a:pPr marL="0" indent="0">
-              <a:buNone/>
-            </a:pPr>
-            <a:r>
-              <a:rPr sz="1300">
-                <a:solidFill>
-                  <a:srgbClr val="D8D8D2"/>
-                </a:solidFill>
-                <a:latin typeface="Arial"/>
-                <a:ea typeface="Arial"/>
-                <a:cs typeface="Arial"/>
-              </a:rPr>
-              <a:t>Pro CPC, invoices</a:t>
-            </a:r>
-          </a:p>
-        </p:txBody>
-      </p:sp>
-      <p:sp>
-        <p:nvSpPr>
           <p:cNvPr id="25" name="Seller Activity card">
             <a:extLst>
               <a:ext uri="{FF2B5EF4-FFF2-40B4-BE49-F238E27FC236}">
@@ -2922,7 +2740,9 @@
             <a:ext cx="2087880" cy="1466850"/>
           </a:xfrm>
           <a:prstGeom prst="roundRect">
-            <a:avLst/>
+            <a:avLst>
+              <a:gd name="adj" fmla="val 7000"/>
+            </a:avLst>
           </a:prstGeom>
           <a:solidFill>
             <a:srgbClr val="0E0E0E"/>
@@ -3026,168 +2846,6 @@
       </p:sp>
       <p:sp>
         <p:nvSpPr>
-          <p:cNvPr id="28" name="Signal bullet">
-            <a:extLst>
-              <a:ext uri="{FF2B5EF4-FFF2-40B4-BE49-F238E27FC236}">
-                <a16:creationId xmlns:a16="http://schemas.microsoft.com/office/drawing/2014/main" id="{144F21A3-D738-452D-AAE6-160D2E809261}"/>
-              </a:ext>
-            </a:extLst>
-          </p:cNvPr>
-          <p:cNvSpPr>
-            <a:spLocks noGrp="1"/>
-          </p:cNvSpPr>
-          <p:nvPr/>
-        </p:nvSpPr>
-        <p:spPr>
-          <a:xfrm>
-            <a:off x="5223510" y="3215712"/>
-            <a:ext cx="66675" cy="66675"/>
-          </a:xfrm>
-          <a:prstGeom prst="ellipse">
-            <a:avLst/>
-          </a:prstGeom>
-          <a:solidFill>
-            <a:srgbClr val="FFD426"/>
-          </a:solidFill>
-          <a:ln w="0">
-            <a:noFill/>
-          </a:ln>
-        </p:spPr>
-        <p:txBody>
-          <a:bodyPr/>
-          <a:lstStyle/>
-          <a:p>
-            <a:endParaRPr/>
-          </a:p>
-        </p:txBody>
-      </p:sp>
-      <p:sp>
-        <p:nvSpPr>
-          <p:cNvPr id="29" name="Seller Activity item">
-            <a:extLst>
-              <a:ext uri="{FF2B5EF4-FFF2-40B4-BE49-F238E27FC236}">
-                <a16:creationId xmlns:a16="http://schemas.microsoft.com/office/drawing/2014/main" id="{49F3CCD9-43DB-4DF4-9E52-3895C28C1A51}"/>
-              </a:ext>
-            </a:extLst>
-          </p:cNvPr>
-          <p:cNvSpPr>
-            <a:spLocks noGrp="1"/>
-          </p:cNvSpPr>
-          <p:nvPr/>
-        </p:nvSpPr>
-        <p:spPr>
-          <a:xfrm>
-            <a:off x="5356860" y="3149037"/>
-            <a:ext cx="1630680" cy="323850"/>
-          </a:xfrm>
-          <a:prstGeom prst="rect">
-            <a:avLst/>
-          </a:prstGeom>
-        </p:spPr>
-        <p:txBody>
-          <a:bodyPr wrap="square" lIns="0" tIns="0" rIns="0" bIns="0" anchor="t"/>
-          <a:lstStyle/>
-          <a:p>
-            <a:pPr marL="0" indent="0">
-              <a:buNone/>
-            </a:pPr>
-            <a:r>
-              <a:rPr sz="1300">
-                <a:solidFill>
-                  <a:srgbClr val="D8D8D2"/>
-                </a:solidFill>
-                <a:latin typeface="Arial"/>
-                <a:ea typeface="Arial"/>
-                <a:cs typeface="Arial"/>
-              </a:rPr>
-              <a:t>Listing volume</a:t>
-            </a:r>
-          </a:p>
-        </p:txBody>
-      </p:sp>
-      <p:sp>
-        <p:nvSpPr>
-          <p:cNvPr id="30" name="Signal bullet">
-            <a:extLst>
-              <a:ext uri="{FF2B5EF4-FFF2-40B4-BE49-F238E27FC236}">
-                <a16:creationId xmlns:a16="http://schemas.microsoft.com/office/drawing/2014/main" id="{8BC7A4E6-11F4-43B9-9D4F-3980FAEC70AE}"/>
-              </a:ext>
-            </a:extLst>
-          </p:cNvPr>
-          <p:cNvSpPr>
-            <a:spLocks noGrp="1"/>
-          </p:cNvSpPr>
-          <p:nvPr/>
-        </p:nvSpPr>
-        <p:spPr>
-          <a:xfrm>
-            <a:off x="5223510" y="3625287"/>
-            <a:ext cx="66675" cy="66675"/>
-          </a:xfrm>
-          <a:prstGeom prst="ellipse">
-            <a:avLst/>
-          </a:prstGeom>
-          <a:solidFill>
-            <a:srgbClr val="FFD426"/>
-          </a:solidFill>
-          <a:ln w="0">
-            <a:noFill/>
-          </a:ln>
-        </p:spPr>
-        <p:txBody>
-          <a:bodyPr/>
-          <a:lstStyle/>
-          <a:p>
-            <a:endParaRPr/>
-          </a:p>
-        </p:txBody>
-      </p:sp>
-      <p:sp>
-        <p:nvSpPr>
-          <p:cNvPr id="31" name="Seller Activity item">
-            <a:extLst>
-              <a:ext uri="{FF2B5EF4-FFF2-40B4-BE49-F238E27FC236}">
-                <a16:creationId xmlns:a16="http://schemas.microsoft.com/office/drawing/2014/main" id="{0E9B555A-9C31-4082-A516-9A9DEA35A176}"/>
-              </a:ext>
-            </a:extLst>
-          </p:cNvPr>
-          <p:cNvSpPr>
-            <a:spLocks noGrp="1"/>
-          </p:cNvSpPr>
-          <p:nvPr/>
-        </p:nvSpPr>
-        <p:spPr>
-          <a:xfrm>
-            <a:off x="5356860" y="3558612"/>
-            <a:ext cx="1630680" cy="323850"/>
-          </a:xfrm>
-          <a:prstGeom prst="rect">
-            <a:avLst/>
-          </a:prstGeom>
-        </p:spPr>
-        <p:txBody>
-          <a:bodyPr wrap="square" lIns="0" tIns="0" rIns="0" bIns="0" anchor="t"/>
-          <a:lstStyle/>
-          <a:p>
-            <a:pPr marL="0" indent="0">
-              <a:buNone/>
-            </a:pPr>
-            <a:r>
-              <a:rPr sz="1300">
-                <a:solidFill>
-                  <a:srgbClr val="D8D8D2"/>
-                </a:solidFill>
-                <a:latin typeface="Arial"/>
-                <a:ea typeface="Arial"/>
-                <a:cs typeface="Arial"/>
-              </a:rPr>
-              <a:t>Active and recent listings</a:t>
-            </a:r>
-          </a:p>
-        </p:txBody>
-      </p:sp>
-      <p:sp>
-        <p:nvSpPr>
           <p:cNvPr id="32" name="Category Focus card">
             <a:extLst>
               <a:ext uri="{FF2B5EF4-FFF2-40B4-BE49-F238E27FC236}">
@@ -3206,7 +2864,9 @@
             <a:ext cx="2087880" cy="1466850"/>
           </a:xfrm>
           <a:prstGeom prst="roundRect">
-            <a:avLst/>
+            <a:avLst>
+              <a:gd name="adj" fmla="val 7000"/>
+            </a:avLst>
           </a:prstGeom>
           <a:solidFill>
             <a:srgbClr val="0E0E0E"/>
@@ -3321,168 +2981,6 @@
       </p:sp>
       <p:sp>
         <p:nvSpPr>
-          <p:cNvPr id="35" name="Signal bullet">
-            <a:extLst>
-              <a:ext uri="{FF2B5EF4-FFF2-40B4-BE49-F238E27FC236}">
-                <a16:creationId xmlns:a16="http://schemas.microsoft.com/office/drawing/2014/main" id="{7A6351F8-4C68-48D0-B0B9-9D66CF8A3D68}"/>
-              </a:ext>
-            </a:extLst>
-          </p:cNvPr>
-          <p:cNvSpPr>
-            <a:spLocks noGrp="1"/>
-          </p:cNvSpPr>
-          <p:nvPr/>
-        </p:nvSpPr>
-        <p:spPr>
-          <a:xfrm>
-            <a:off x="7444740" y="3215712"/>
-            <a:ext cx="66675" cy="66675"/>
-          </a:xfrm>
-          <a:prstGeom prst="ellipse">
-            <a:avLst/>
-          </a:prstGeom>
-          <a:solidFill>
-            <a:srgbClr val="FFD426"/>
-          </a:solidFill>
-          <a:ln w="0">
-            <a:noFill/>
-          </a:ln>
-        </p:spPr>
-        <p:txBody>
-          <a:bodyPr/>
-          <a:lstStyle/>
-          <a:p>
-            <a:endParaRPr/>
-          </a:p>
-        </p:txBody>
-      </p:sp>
-      <p:sp>
-        <p:nvSpPr>
-          <p:cNvPr id="36" name="Category Focus item">
-            <a:extLst>
-              <a:ext uri="{FF2B5EF4-FFF2-40B4-BE49-F238E27FC236}">
-                <a16:creationId xmlns:a16="http://schemas.microsoft.com/office/drawing/2014/main" id="{B1A97181-513A-4A9F-A03F-DD5DB8ED741A}"/>
-              </a:ext>
-            </a:extLst>
-          </p:cNvPr>
-          <p:cNvSpPr>
-            <a:spLocks noGrp="1"/>
-          </p:cNvSpPr>
-          <p:nvPr/>
-        </p:nvSpPr>
-        <p:spPr>
-          <a:xfrm>
-            <a:off x="7578090" y="3149037"/>
-            <a:ext cx="1630680" cy="323850"/>
-          </a:xfrm>
-          <a:prstGeom prst="rect">
-            <a:avLst/>
-          </a:prstGeom>
-        </p:spPr>
-        <p:txBody>
-          <a:bodyPr wrap="square" lIns="0" tIns="0" rIns="0" bIns="0" anchor="t"/>
-          <a:lstStyle/>
-          <a:p>
-            <a:pPr marL="0" indent="0">
-              <a:buNone/>
-            </a:pPr>
-            <a:r>
-              <a:rPr sz="1300">
-                <a:solidFill>
-                  <a:srgbClr val="D8D8D2"/>
-                </a:solidFill>
-                <a:latin typeface="Arial"/>
-                <a:ea typeface="Arial"/>
-                <a:cs typeface="Arial"/>
-              </a:rPr>
-              <a:t>Repeated category/subcategory</a:t>
-            </a:r>
-          </a:p>
-        </p:txBody>
-      </p:sp>
-      <p:sp>
-        <p:nvSpPr>
-          <p:cNvPr id="37" name="Signal bullet">
-            <a:extLst>
-              <a:ext uri="{FF2B5EF4-FFF2-40B4-BE49-F238E27FC236}">
-                <a16:creationId xmlns:a16="http://schemas.microsoft.com/office/drawing/2014/main" id="{3BE1C13B-6D87-4F60-9FC9-A66B16638F60}"/>
-              </a:ext>
-            </a:extLst>
-          </p:cNvPr>
-          <p:cNvSpPr>
-            <a:spLocks noGrp="1"/>
-          </p:cNvSpPr>
-          <p:nvPr/>
-        </p:nvSpPr>
-        <p:spPr>
-          <a:xfrm>
-            <a:off x="7444740" y="3625287"/>
-            <a:ext cx="66675" cy="66675"/>
-          </a:xfrm>
-          <a:prstGeom prst="ellipse">
-            <a:avLst/>
-          </a:prstGeom>
-          <a:solidFill>
-            <a:srgbClr val="FFD426"/>
-          </a:solidFill>
-          <a:ln w="0">
-            <a:noFill/>
-          </a:ln>
-        </p:spPr>
-        <p:txBody>
-          <a:bodyPr/>
-          <a:lstStyle/>
-          <a:p>
-            <a:endParaRPr/>
-          </a:p>
-        </p:txBody>
-      </p:sp>
-      <p:sp>
-        <p:nvSpPr>
-          <p:cNvPr id="38" name="Category Focus item">
-            <a:extLst>
-              <a:ext uri="{FF2B5EF4-FFF2-40B4-BE49-F238E27FC236}">
-                <a16:creationId xmlns:a16="http://schemas.microsoft.com/office/drawing/2014/main" id="{0C6E2724-9D5D-4507-85DB-BC4B505BB9E6}"/>
-              </a:ext>
-            </a:extLst>
-          </p:cNvPr>
-          <p:cNvSpPr>
-            <a:spLocks noGrp="1"/>
-          </p:cNvSpPr>
-          <p:nvPr/>
-        </p:nvSpPr>
-        <p:spPr>
-          <a:xfrm>
-            <a:off x="7578090" y="3558612"/>
-            <a:ext cx="1630680" cy="323850"/>
-          </a:xfrm>
-          <a:prstGeom prst="rect">
-            <a:avLst/>
-          </a:prstGeom>
-        </p:spPr>
-        <p:txBody>
-          <a:bodyPr wrap="square" lIns="0" tIns="0" rIns="0" bIns="0" anchor="t"/>
-          <a:lstStyle/>
-          <a:p>
-            <a:pPr marL="0" indent="0">
-              <a:buNone/>
-            </a:pPr>
-            <a:r>
-              <a:rPr sz="1300">
-                <a:solidFill>
-                  <a:srgbClr val="D8D8D2"/>
-                </a:solidFill>
-                <a:latin typeface="Arial"/>
-                <a:ea typeface="Arial"/>
-                <a:cs typeface="Arial"/>
-              </a:rPr>
-              <a:t>Category-specific thresholds</a:t>
-            </a:r>
-          </a:p>
-        </p:txBody>
-      </p:sp>
-      <p:sp>
-        <p:nvSpPr>
           <p:cNvPr id="39" name="Buyer Demand card">
             <a:extLst>
               <a:ext uri="{FF2B5EF4-FFF2-40B4-BE49-F238E27FC236}">
@@ -3501,7 +2999,9 @@
             <a:ext cx="2087880" cy="1466850"/>
           </a:xfrm>
           <a:prstGeom prst="roundRect">
-            <a:avLst/>
+            <a:avLst>
+              <a:gd name="adj" fmla="val 7000"/>
+            </a:avLst>
           </a:prstGeom>
           <a:solidFill>
             <a:srgbClr val="0E0E0E"/>
@@ -3616,168 +3116,6 @@
       </p:sp>
       <p:sp>
         <p:nvSpPr>
-          <p:cNvPr id="42" name="Signal bullet">
-            <a:extLst>
-              <a:ext uri="{FF2B5EF4-FFF2-40B4-BE49-F238E27FC236}">
-                <a16:creationId xmlns:a16="http://schemas.microsoft.com/office/drawing/2014/main" id="{29AAEA38-388B-4218-AF99-760F3ACB07B3}"/>
-              </a:ext>
-            </a:extLst>
-          </p:cNvPr>
-          <p:cNvSpPr>
-            <a:spLocks noGrp="1"/>
-          </p:cNvSpPr>
-          <p:nvPr/>
-        </p:nvSpPr>
-        <p:spPr>
-          <a:xfrm>
-            <a:off x="9665970" y="3215712"/>
-            <a:ext cx="66675" cy="66675"/>
-          </a:xfrm>
-          <a:prstGeom prst="ellipse">
-            <a:avLst/>
-          </a:prstGeom>
-          <a:solidFill>
-            <a:srgbClr val="FFD426"/>
-          </a:solidFill>
-          <a:ln w="0">
-            <a:noFill/>
-          </a:ln>
-        </p:spPr>
-        <p:txBody>
-          <a:bodyPr/>
-          <a:lstStyle/>
-          <a:p>
-            <a:endParaRPr/>
-          </a:p>
-        </p:txBody>
-      </p:sp>
-      <p:sp>
-        <p:nvSpPr>
-          <p:cNvPr id="43" name="Buyer Demand item">
-            <a:extLst>
-              <a:ext uri="{FF2B5EF4-FFF2-40B4-BE49-F238E27FC236}">
-                <a16:creationId xmlns:a16="http://schemas.microsoft.com/office/drawing/2014/main" id="{6EF00164-93C6-4F9D-A165-828EA0E36D9A}"/>
-              </a:ext>
-            </a:extLst>
-          </p:cNvPr>
-          <p:cNvSpPr>
-            <a:spLocks noGrp="1"/>
-          </p:cNvSpPr>
-          <p:nvPr/>
-        </p:nvSpPr>
-        <p:spPr>
-          <a:xfrm>
-            <a:off x="9799320" y="3149037"/>
-            <a:ext cx="1630680" cy="323850"/>
-          </a:xfrm>
-          <a:prstGeom prst="rect">
-            <a:avLst/>
-          </a:prstGeom>
-        </p:spPr>
-        <p:txBody>
-          <a:bodyPr wrap="square" lIns="0" tIns="0" rIns="0" bIns="0" anchor="t"/>
-          <a:lstStyle/>
-          <a:p>
-            <a:pPr marL="0" indent="0">
-              <a:buNone/>
-            </a:pPr>
-            <a:r>
-              <a:rPr sz="1300">
-                <a:solidFill>
-                  <a:srgbClr val="D8D8D2"/>
-                </a:solidFill>
-                <a:latin typeface="Arial"/>
-                <a:ea typeface="Arial"/>
-                <a:cs typeface="Arial"/>
-              </a:rPr>
-              <a:t>Engaged ads</a:t>
-            </a:r>
-          </a:p>
-        </p:txBody>
-      </p:sp>
-      <p:sp>
-        <p:nvSpPr>
-          <p:cNvPr id="44" name="Signal bullet">
-            <a:extLst>
-              <a:ext uri="{FF2B5EF4-FFF2-40B4-BE49-F238E27FC236}">
-                <a16:creationId xmlns:a16="http://schemas.microsoft.com/office/drawing/2014/main" id="{25757DBF-E54D-41B9-8864-36A3772C014F}"/>
-              </a:ext>
-            </a:extLst>
-          </p:cNvPr>
-          <p:cNvSpPr>
-            <a:spLocks noGrp="1"/>
-          </p:cNvSpPr>
-          <p:nvPr/>
-        </p:nvSpPr>
-        <p:spPr>
-          <a:xfrm>
-            <a:off x="9665970" y="3625287"/>
-            <a:ext cx="66675" cy="66675"/>
-          </a:xfrm>
-          <a:prstGeom prst="ellipse">
-            <a:avLst/>
-          </a:prstGeom>
-          <a:solidFill>
-            <a:srgbClr val="FFD426"/>
-          </a:solidFill>
-          <a:ln w="0">
-            <a:noFill/>
-          </a:ln>
-        </p:spPr>
-        <p:txBody>
-          <a:bodyPr/>
-          <a:lstStyle/>
-          <a:p>
-            <a:endParaRPr/>
-          </a:p>
-        </p:txBody>
-      </p:sp>
-      <p:sp>
-        <p:nvSpPr>
-          <p:cNvPr id="45" name="Buyer Demand item">
-            <a:extLst>
-              <a:ext uri="{FF2B5EF4-FFF2-40B4-BE49-F238E27FC236}">
-                <a16:creationId xmlns:a16="http://schemas.microsoft.com/office/drawing/2014/main" id="{C27D2C33-21D5-4658-8E6A-35747344CF5E}"/>
-              </a:ext>
-            </a:extLst>
-          </p:cNvPr>
-          <p:cNvSpPr>
-            <a:spLocks noGrp="1"/>
-          </p:cNvSpPr>
-          <p:nvPr/>
-        </p:nvSpPr>
-        <p:spPr>
-          <a:xfrm>
-            <a:off x="9799320" y="3558612"/>
-            <a:ext cx="1630680" cy="323850"/>
-          </a:xfrm>
-          <a:prstGeom prst="rect">
-            <a:avLst/>
-          </a:prstGeom>
-        </p:spPr>
-        <p:txBody>
-          <a:bodyPr wrap="square" lIns="0" tIns="0" rIns="0" bIns="0" anchor="t"/>
-          <a:lstStyle/>
-          <a:p>
-            <a:pPr marL="0" indent="0">
-              <a:buNone/>
-            </a:pPr>
-            <a:r>
-              <a:rPr sz="1300">
-                <a:solidFill>
-                  <a:srgbClr val="D8D8D2"/>
-                </a:solidFill>
-                <a:latin typeface="Arial"/>
-                <a:ea typeface="Arial"/>
-                <a:cs typeface="Arial"/>
-              </a:rPr>
-              <a:t>Unique buyers, engagement rate</a:t>
-            </a:r>
-          </a:p>
-        </p:txBody>
-      </p:sp>
-      <p:sp>
-        <p:nvSpPr>
           <p:cNvPr id="46" name="Scoring Flow label">
             <a:extLst>
               <a:ext uri="{FF2B5EF4-FFF2-40B4-BE49-F238E27FC236}">
@@ -3807,7 +3145,7 @@
               <a:buNone/>
             </a:pPr>
             <a:r>
-              <a:rPr sz="1800" b="1">
+              <a:rPr sz="1800" b="1" dirty="0">
                 <a:solidFill>
                   <a:srgbClr val="FFD426"/>
                 </a:solidFill>
@@ -4442,6 +3780,336 @@
           </a:p>
         </p:txBody>
       </p:sp>
+      <p:sp>
+        <p:nvSpPr>
+          <p:cNvPr id="62" name="Business Markers list"/>
+          <p:cNvSpPr>
+            <a:spLocks noGrp="1"/>
+          </p:cNvSpPr>
+          <p:nvPr/>
+        </p:nvSpPr>
+        <p:spPr>
+          <a:xfrm>
+            <a:off x="609600" y="3149037"/>
+            <a:ext cx="1913350" cy="720000"/>
+          </a:xfrm>
+          <a:prstGeom prst="rect">
+            <a:avLst/>
+          </a:prstGeom>
+          <a:noFill/>
+          <a:ln w="0">
+            <a:noFill/>
+          </a:ln>
+        </p:spPr>
+        <p:txBody>
+          <a:bodyPr lIns="0" tIns="0" rIns="0" bIns="0"/>
+          <a:lstStyle/>
+          <a:p>
+            <a:pPr marL="361950" indent="-285750" algn="l">
+              <a:buClr>
+                <a:srgbClr val="FFD525"/>
+              </a:buClr>
+              <a:buFont typeface="Wingdings" pitchFamily="2" charset="2"/>
+              <a:buChar char="§"/>
+            </a:pPr>
+            <a:r>
+              <a:rPr sz="1300" dirty="0">
+                <a:solidFill>
+                  <a:srgbClr val="D8D8D2"/>
+                </a:solidFill>
+                <a:latin typeface="Arial"/>
+                <a:ea typeface="Arial"/>
+                <a:cs typeface="Arial"/>
+              </a:rPr>
+              <a:t>Corporate bank flag</a:t>
+            </a:r>
+          </a:p>
+          <a:p>
+            <a:pPr marL="361950" indent="-285750" algn="l">
+              <a:buClr>
+                <a:srgbClr val="FFD525"/>
+              </a:buClr>
+              <a:buFont typeface="Wingdings" pitchFamily="2" charset="2"/>
+              <a:buChar char="§"/>
+            </a:pPr>
+            <a:r>
+              <a:rPr sz="1300" dirty="0">
+                <a:solidFill>
+                  <a:srgbClr val="D8D8D2"/>
+                </a:solidFill>
+                <a:latin typeface="Arial"/>
+                <a:ea typeface="Arial"/>
+                <a:cs typeface="Arial"/>
+              </a:rPr>
+              <a:t>External URL</a:t>
+            </a:r>
+          </a:p>
+        </p:txBody>
+      </p:sp>
+      <p:sp>
+        <p:nvSpPr>
+          <p:cNvPr id="63" name="Paid Usage list"/>
+          <p:cNvSpPr>
+            <a:spLocks noGrp="1"/>
+          </p:cNvSpPr>
+          <p:nvPr/>
+        </p:nvSpPr>
+        <p:spPr>
+          <a:xfrm>
+            <a:off x="2830830" y="3149037"/>
+            <a:ext cx="1780000" cy="720000"/>
+          </a:xfrm>
+          <a:prstGeom prst="rect">
+            <a:avLst/>
+          </a:prstGeom>
+          <a:noFill/>
+          <a:ln w="0">
+            <a:noFill/>
+          </a:ln>
+        </p:spPr>
+        <p:txBody>
+          <a:bodyPr lIns="0" tIns="0" rIns="0" bIns="0"/>
+          <a:lstStyle/>
+          <a:p>
+            <a:pPr marL="361950" indent="-285750" algn="l">
+              <a:buClr>
+                <a:srgbClr val="FFD426"/>
+              </a:buClr>
+              <a:buFont typeface="Wingdings" pitchFamily="2" charset="2"/>
+              <a:buChar char="§"/>
+            </a:pPr>
+            <a:r>
+              <a:rPr sz="1300" dirty="0">
+                <a:solidFill>
+                  <a:srgbClr val="D8D8D2"/>
+                </a:solidFill>
+                <a:latin typeface="Arial"/>
+                <a:ea typeface="Arial"/>
+                <a:cs typeface="Arial"/>
+              </a:rPr>
+              <a:t>Paid features</a:t>
+            </a:r>
+          </a:p>
+          <a:p>
+            <a:pPr marL="361950" indent="-285750" algn="l">
+              <a:buClr>
+                <a:srgbClr val="FFD426"/>
+              </a:buClr>
+              <a:buFont typeface="Wingdings" pitchFamily="2" charset="2"/>
+              <a:buChar char="§"/>
+            </a:pPr>
+            <a:r>
+              <a:rPr sz="1300" dirty="0">
+                <a:solidFill>
+                  <a:srgbClr val="D8D8D2"/>
+                </a:solidFill>
+                <a:latin typeface="Arial"/>
+                <a:ea typeface="Arial"/>
+                <a:cs typeface="Arial"/>
+              </a:rPr>
+              <a:t>Pro CPC, invoices</a:t>
+            </a:r>
+          </a:p>
+        </p:txBody>
+      </p:sp>
+      <p:sp>
+        <p:nvSpPr>
+          <p:cNvPr id="64" name="Seller Activity list"/>
+          <p:cNvSpPr>
+            <a:spLocks noGrp="1"/>
+          </p:cNvSpPr>
+          <p:nvPr/>
+        </p:nvSpPr>
+        <p:spPr>
+          <a:xfrm>
+            <a:off x="5052060" y="3149037"/>
+            <a:ext cx="1973580" cy="780000"/>
+          </a:xfrm>
+          <a:prstGeom prst="rect">
+            <a:avLst/>
+          </a:prstGeom>
+          <a:noFill/>
+          <a:ln w="0">
+            <a:noFill/>
+          </a:ln>
+        </p:spPr>
+        <p:txBody>
+          <a:bodyPr lIns="0" tIns="0" rIns="0" bIns="0"/>
+          <a:lstStyle/>
+          <a:p>
+            <a:pPr marL="361950" indent="-285750" algn="l">
+              <a:buClr>
+                <a:srgbClr val="FFD426"/>
+              </a:buClr>
+              <a:buFont typeface="Wingdings" pitchFamily="2" charset="2"/>
+              <a:buChar char="§"/>
+            </a:pPr>
+            <a:r>
+              <a:rPr sz="1300" dirty="0">
+                <a:solidFill>
+                  <a:srgbClr val="D8D8D2"/>
+                </a:solidFill>
+                <a:latin typeface="Arial"/>
+                <a:ea typeface="Arial"/>
+                <a:cs typeface="Arial"/>
+              </a:rPr>
+              <a:t>Listing volume</a:t>
+            </a:r>
+          </a:p>
+          <a:p>
+            <a:pPr marL="361950" indent="-285750" algn="l">
+              <a:buClr>
+                <a:srgbClr val="FFD426"/>
+              </a:buClr>
+              <a:buFont typeface="Wingdings" pitchFamily="2" charset="2"/>
+              <a:buChar char="§"/>
+            </a:pPr>
+            <a:r>
+              <a:rPr sz="1300" dirty="0">
+                <a:solidFill>
+                  <a:srgbClr val="D8D8D2"/>
+                </a:solidFill>
+                <a:latin typeface="Arial"/>
+                <a:ea typeface="Arial"/>
+                <a:cs typeface="Arial"/>
+              </a:rPr>
+              <a:t>Active and recent listings</a:t>
+            </a:r>
+          </a:p>
+        </p:txBody>
+      </p:sp>
+      <p:sp>
+        <p:nvSpPr>
+          <p:cNvPr id="65" name="Category Focus list"/>
+          <p:cNvSpPr>
+            <a:spLocks noGrp="1"/>
+          </p:cNvSpPr>
+          <p:nvPr/>
+        </p:nvSpPr>
+        <p:spPr>
+          <a:xfrm>
+            <a:off x="7273290" y="3149037"/>
+            <a:ext cx="1973580" cy="820000"/>
+          </a:xfrm>
+          <a:prstGeom prst="rect">
+            <a:avLst/>
+          </a:prstGeom>
+          <a:noFill/>
+          <a:ln w="0">
+            <a:noFill/>
+          </a:ln>
+        </p:spPr>
+        <p:txBody>
+          <a:bodyPr lIns="0" tIns="0" rIns="0" bIns="0"/>
+          <a:lstStyle/>
+          <a:p>
+            <a:pPr marL="361950" indent="-285750" algn="l">
+              <a:buClr>
+                <a:srgbClr val="FFD426"/>
+              </a:buClr>
+              <a:buFont typeface="Wingdings" pitchFamily="2" charset="2"/>
+              <a:buChar char="§"/>
+            </a:pPr>
+            <a:r>
+              <a:rPr sz="1300" dirty="0">
+                <a:solidFill>
+                  <a:srgbClr val="D8D8D2"/>
+                </a:solidFill>
+                <a:latin typeface="Arial"/>
+                <a:ea typeface="Arial"/>
+                <a:cs typeface="Arial"/>
+              </a:rPr>
+              <a:t>Repeated category</a:t>
+            </a:r>
+          </a:p>
+          <a:p>
+            <a:pPr marL="361950" indent="-285750" algn="l">
+              <a:buClr>
+                <a:srgbClr val="FFD426"/>
+              </a:buClr>
+              <a:buFont typeface="Wingdings" pitchFamily="2" charset="2"/>
+              <a:buChar char="§"/>
+            </a:pPr>
+            <a:r>
+              <a:rPr sz="1300" dirty="0">
+                <a:solidFill>
+                  <a:srgbClr val="D8D8D2"/>
+                </a:solidFill>
+                <a:latin typeface="Arial"/>
+                <a:ea typeface="Arial"/>
+                <a:cs typeface="Arial"/>
+              </a:rPr>
+              <a:t>Category-specific thresholds</a:t>
+            </a:r>
+          </a:p>
+        </p:txBody>
+      </p:sp>
+      <p:sp>
+        <p:nvSpPr>
+          <p:cNvPr id="66" name="Buyer Demand list"/>
+          <p:cNvSpPr>
+            <a:spLocks noGrp="1"/>
+          </p:cNvSpPr>
+          <p:nvPr/>
+        </p:nvSpPr>
+        <p:spPr>
+          <a:xfrm>
+            <a:off x="9494520" y="3149037"/>
+            <a:ext cx="1780000" cy="820000"/>
+          </a:xfrm>
+          <a:prstGeom prst="rect">
+            <a:avLst/>
+          </a:prstGeom>
+          <a:noFill/>
+          <a:ln w="0">
+            <a:noFill/>
+          </a:ln>
+        </p:spPr>
+        <p:txBody>
+          <a:bodyPr lIns="0" tIns="0" rIns="0" bIns="0"/>
+          <a:lstStyle/>
+          <a:p>
+            <a:pPr marL="361950" indent="-285750" algn="l">
+              <a:buClr>
+                <a:srgbClr val="FFD426"/>
+              </a:buClr>
+              <a:buFont typeface="Wingdings" pitchFamily="2" charset="2"/>
+              <a:buChar char="§"/>
+            </a:pPr>
+            <a:r>
+              <a:rPr sz="1300" dirty="0">
+                <a:solidFill>
+                  <a:srgbClr val="D8D8D2"/>
+                </a:solidFill>
+                <a:latin typeface="Arial"/>
+                <a:ea typeface="Arial"/>
+                <a:cs typeface="Arial"/>
+              </a:rPr>
+              <a:t>Engaged ads</a:t>
+            </a:r>
+          </a:p>
+          <a:p>
+            <a:pPr marL="361950" indent="-285750" algn="l">
+              <a:buClr>
+                <a:srgbClr val="FFD426"/>
+              </a:buClr>
+              <a:buFont typeface="Wingdings" pitchFamily="2" charset="2"/>
+              <a:buChar char="§"/>
+            </a:pPr>
+            <a:r>
+              <a:rPr sz="1300" dirty="0">
+                <a:solidFill>
+                  <a:srgbClr val="D8D8D2"/>
+                </a:solidFill>
+                <a:latin typeface="Arial"/>
+                <a:ea typeface="Arial"/>
+                <a:cs typeface="Arial"/>
+              </a:rPr>
+              <a:t>Unique buyers, engagement rate</a:t>
+            </a:r>
+          </a:p>
+        </p:txBody>
+      </p:sp>
     </p:spTree>
     <p:extLst>
       <p:ext uri="{BB962C8B-B14F-4D97-AF65-F5344CB8AC3E}">
@@ -4452,6 +4120,11 @@
   <p:clrMapOvr>
     <a:masterClrMapping/>
   </p:clrMapOvr>
+  <p:extLst>
+    <p:ext uri="{6950BFC3-D8DA-4A85-94F7-54DA5524770B}">
+      <p188:commentRel xmlns:p188="http://schemas.microsoft.com/office/powerpoint/2018/8/main" r:id="rId3"/>
+    </p:ext>
+  </p:extLst>
 </p:sld>
 </file>
 
@@ -5823,7 +5496,13 @@
         <p:nvGraphicFramePr>
           <p:cNvPr id="17" name="Markdown table"/>
           <p:cNvGraphicFramePr/>
-          <p:nvPr/>
+          <p:nvPr>
+            <p:extLst>
+              <p:ext uri="{D42A27DB-BD31-4B8C-83A1-F6EECF244321}">
+                <p14:modId xmlns:p14="http://schemas.microsoft.com/office/powerpoint/2010/main" val="143331012"/>
+              </p:ext>
+            </p:extLst>
+          </p:nvPr>
         </p:nvGraphicFramePr>
         <p:xfrm>
           <a:off x="552450" y="2417300"/>
@@ -6946,7 +6625,7 @@
                         <a:buNone/>
                       </a:pPr>
                       <a:r>
-                        <a:rPr sz="1100" b="0">
+                        <a:rPr sz="1100" b="0" dirty="0">
                           <a:solidFill>
                             <a:srgbClr val="F3F4F6"/>
                           </a:solidFill>
@@ -7040,7 +6719,7 @@
                         <a:buNone/>
                       </a:pPr>
                       <a:r>
-                        <a:rPr sz="1100" b="0">
+                        <a:rPr sz="1100" b="0" dirty="0">
                           <a:solidFill>
                             <a:srgbClr val="F3F4F6"/>
                           </a:solidFill>
@@ -7252,6 +6931,11 @@
   <p:clrMapOvr>
     <a:masterClrMapping/>
   </p:clrMapOvr>
+  <p:extLst>
+    <p:ext uri="{6950BFC3-D8DA-4A85-94F7-54DA5524770B}">
+      <p188:commentRel xmlns:p188="http://schemas.microsoft.com/office/powerpoint/2018/8/main" r:id="rId3"/>
+    </p:ext>
+  </p:extLst>
 </p:sld>
 </file>
 
@@ -11514,6 +11198,11 @@
   <p:clrMapOvr>
     <a:masterClrMapping/>
   </p:clrMapOvr>
+  <p:extLst>
+    <p:ext uri="{6950BFC3-D8DA-4A85-94F7-54DA5524770B}">
+      <p188:commentRel xmlns:p188="http://schemas.microsoft.com/office/powerpoint/2018/8/main" r:id="rId3"/>
+    </p:ext>
+  </p:extLst>
 </p:sld>
 </file>
 
@@ -12447,7 +12136,7 @@
                         <a:buNone/>
                       </a:pPr>
                       <a:r>
-                        <a:rPr sz="1100" b="0">
+                        <a:rPr sz="1100" b="0" dirty="0">
                           <a:solidFill>
                             <a:srgbClr val="D8D8D2"/>
                           </a:solidFill>
@@ -12494,7 +12183,7 @@
                         <a:buNone/>
                       </a:pPr>
                       <a:r>
-                        <a:rPr sz="1100" b="0">
+                        <a:rPr sz="1100" b="0" dirty="0">
                           <a:solidFill>
                             <a:srgbClr val="D8D8D2"/>
                           </a:solidFill>
@@ -12588,7 +12277,7 @@
               </a:defRPr>
             </a:pPr>
             <a:r>
-              <a:rPr sz="1100" b="0">
+              <a:rPr sz="1100" b="0" dirty="0">
                 <a:solidFill>
                   <a:srgbClr val="F3F4F6"/>
                 </a:solidFill>
@@ -12596,7 +12285,51 @@
                 <a:ea typeface="Arial"/>
                 <a:cs typeface="Arial"/>
               </a:rPr>
-              <a:t>Output: ranked sellers with user_id, smb_score, confidence tier, top reasons, and recommended action.</a:t>
+              <a:t>Output: ranked sellers with </a:t>
+            </a:r>
+            <a:r>
+              <a:rPr sz="1100" b="0" dirty="0" err="1">
+                <a:solidFill>
+                  <a:srgbClr val="F3F4F6"/>
+                </a:solidFill>
+                <a:latin typeface="Arial"/>
+                <a:ea typeface="Arial"/>
+                <a:cs typeface="Arial"/>
+              </a:rPr>
+              <a:t>user_id</a:t>
+            </a:r>
+            <a:r>
+              <a:rPr sz="1100" b="0" dirty="0">
+                <a:solidFill>
+                  <a:srgbClr val="F3F4F6"/>
+                </a:solidFill>
+                <a:latin typeface="Arial"/>
+                <a:ea typeface="Arial"/>
+                <a:cs typeface="Arial"/>
+              </a:rPr>
+              <a:t>, </a:t>
+            </a:r>
+            <a:r>
+              <a:rPr sz="1100" b="0" dirty="0" err="1">
+                <a:solidFill>
+                  <a:srgbClr val="F3F4F6"/>
+                </a:solidFill>
+                <a:latin typeface="Arial"/>
+                <a:ea typeface="Arial"/>
+                <a:cs typeface="Arial"/>
+              </a:rPr>
+              <a:t>smb_score</a:t>
+            </a:r>
+            <a:r>
+              <a:rPr sz="1100" b="0" dirty="0">
+                <a:solidFill>
+                  <a:srgbClr val="F3F4F6"/>
+                </a:solidFill>
+                <a:latin typeface="Arial"/>
+                <a:ea typeface="Arial"/>
+                <a:cs typeface="Arial"/>
+              </a:rPr>
+              <a:t>, confidence tier, top reasons, and recommended action.</a:t>
             </a:r>
           </a:p>
         </p:txBody>
@@ -12676,6 +12409,11 @@
   <p:clrMapOvr>
     <a:masterClrMapping/>
   </p:clrMapOvr>
+  <p:extLst>
+    <p:ext uri="{6950BFC3-D8DA-4A85-94F7-54DA5524770B}">
+      <p188:commentRel xmlns:p188="http://schemas.microsoft.com/office/powerpoint/2018/8/main" r:id="rId3"/>
+    </p:ext>
+  </p:extLst>
 </p:sld>
 </file>
 
